--- a/Acentra Health Care  ClaimShield Nexus.pptx
+++ b/Acentra Health Care  ClaimShield Nexus.pptx
@@ -1,42 +1,42 @@
 
 <file path=ppt/presentation.xml><?xml version="1.0" encoding="utf-8"?>
-<p:presentation xmlns:a="http://schemas.openxmlformats.org/drawingml/2006/main" xmlns:r="http://schemas.openxmlformats.org/officeDocument/2006/relationships" xmlns:p="http://schemas.openxmlformats.org/presentationml/2006/main" saveSubsetFonts="1" embedTrueTypeFonts="true">
+<p:presentation xmlns:a="http://schemas.openxmlformats.org/drawingml/2006/main" xmlns:r="http://schemas.openxmlformats.org/officeDocument/2006/relationships" xmlns:p="http://schemas.openxmlformats.org/presentationml/2006/main" embedTrueTypeFonts="1" saveSubsetFonts="1">
   <p:sldMasterIdLst>
     <p:sldMasterId id="2147483648" r:id="rId1"/>
   </p:sldMasterIdLst>
   <p:sldIdLst>
-    <p:sldId id="256" r:id="rId6"/>
-    <p:sldId id="257" r:id="rId7"/>
-    <p:sldId id="258" r:id="rId8"/>
-    <p:sldId id="259" r:id="rId9"/>
-    <p:sldId id="260" r:id="rId10"/>
-    <p:sldId id="261" r:id="rId11"/>
-    <p:sldId id="262" r:id="rId12"/>
-    <p:sldId id="263" r:id="rId13"/>
-    <p:sldId id="264" r:id="rId14"/>
+    <p:sldId id="256" r:id="rId2"/>
+    <p:sldId id="257" r:id="rId3"/>
+    <p:sldId id="258" r:id="rId4"/>
+    <p:sldId id="259" r:id="rId5"/>
+    <p:sldId id="260" r:id="rId6"/>
+    <p:sldId id="261" r:id="rId7"/>
+    <p:sldId id="262" r:id="rId8"/>
+    <p:sldId id="263" r:id="rId9"/>
+    <p:sldId id="264" r:id="rId10"/>
   </p:sldIdLst>
   <p:sldSz cx="18288000" cy="10287000"/>
   <p:notesSz cx="6858000" cy="9144000"/>
   <p:embeddedFontLst>
     <p:embeddedFont>
-      <p:font typeface="Open Sauce" charset="1" panose="00000500000000000000"/>
-      <p:regular r:id="rId15"/>
+      <p:font typeface="Open Sauce" panose="020B0604020202020204" charset="0"/>
+      <p:regular r:id="rId11"/>
     </p:embeddedFont>
     <p:embeddedFont>
-      <p:font typeface="Poppins Semi-Bold" charset="1" panose="00000700000000000000"/>
-      <p:regular r:id="rId16"/>
+      <p:font typeface="Open Sauce Bold" panose="020B0604020202020204" charset="0"/>
+      <p:regular r:id="rId12"/>
     </p:embeddedFont>
     <p:embeddedFont>
-      <p:font typeface="Open Sauce Bold" charset="1" panose="00000800000000000000"/>
-      <p:regular r:id="rId17"/>
+      <p:font typeface="Poppins" panose="00000500000000000000" pitchFamily="2" charset="0"/>
+      <p:regular r:id="rId13"/>
     </p:embeddedFont>
     <p:embeddedFont>
-      <p:font typeface="Poppins Bold" charset="1" panose="00000800000000000000"/>
-      <p:regular r:id="rId18"/>
+      <p:font typeface="Poppins Bold" panose="020B0604020202020204" charset="0"/>
+      <p:regular r:id="rId14"/>
     </p:embeddedFont>
     <p:embeddedFont>
-      <p:font typeface="Poppins" charset="1" panose="00000500000000000000"/>
-      <p:regular r:id="rId19"/>
+      <p:font typeface="Poppins Semi-Bold" panose="020B0604020202020204" charset="0"/>
+      <p:regular r:id="rId15"/>
     </p:embeddedFont>
   </p:embeddedFontLst>
   <p:defaultTextStyle>
@@ -134,6 +134,22 @@
       </a:defRPr>
     </a:lvl9pPr>
   </p:defaultTextStyle>
+  <p:extLst>
+    <p:ext uri="{EFAFB233-063F-42B5-8137-9DF3F51BA10A}">
+      <p15:sldGuideLst xmlns:p15="http://schemas.microsoft.com/office/powerpoint/2012/main">
+        <p15:guide id="1" orient="horz" pos="2160">
+          <p15:clr>
+            <a:srgbClr val="A4A3A4"/>
+          </p15:clr>
+        </p15:guide>
+        <p15:guide id="2" pos="2880">
+          <p15:clr>
+            <a:srgbClr val="A4A3A4"/>
+          </p15:clr>
+        </p15:guide>
+      </p15:sldGuideLst>
+    </p:ext>
+  </p:extLst>
 </p:presentation>
 </file>
 
@@ -175,10 +191,9 @@
           <a:lstStyle/>
           <a:p>
             <a:r>
-              <a:rPr lang="en-US" smtClean="0"/>
+              <a:rPr lang="en-US"/>
               <a:t>Click to edit Master title style</a:t>
             </a:r>
-            <a:endParaRPr lang="en-US"/>
           </a:p>
         </p:txBody>
       </p:sp>
@@ -294,10 +309,9 @@
           </a:lstStyle>
           <a:p>
             <a:r>
-              <a:rPr lang="en-US" smtClean="0"/>
+              <a:rPr lang="en-US"/>
               <a:t>Click to edit Master subtitle style</a:t>
             </a:r>
-            <a:endParaRPr lang="en-US"/>
           </a:p>
         </p:txBody>
       </p:sp>
@@ -319,7 +333,7 @@
             <a:fld id="{1D8BD707-D9CF-40AE-B4C6-C98DA3205C09}" type="datetimeFigureOut">
               <a:rPr lang="en-US" smtClean="0"/>
               <a:pPr/>
-              <a:t>8/1/2011</a:t>
+              <a:t>10/9/2026</a:t>
             </a:fld>
             <a:endParaRPr lang="en-US"/>
           </a:p>
@@ -409,10 +423,9 @@
           <a:lstStyle/>
           <a:p>
             <a:r>
-              <a:rPr lang="en-US" smtClean="0"/>
+              <a:rPr lang="en-US"/>
               <a:t>Click to edit Master title style</a:t>
             </a:r>
-            <a:endParaRPr lang="en-US"/>
           </a:p>
         </p:txBody>
       </p:sp>
@@ -433,38 +446,37 @@
           <a:p>
             <a:pPr lvl="0"/>
             <a:r>
-              <a:rPr lang="en-US" smtClean="0"/>
+              <a:rPr lang="en-US"/>
               <a:t>Click to edit Master text styles</a:t>
             </a:r>
           </a:p>
           <a:p>
             <a:pPr lvl="1"/>
             <a:r>
-              <a:rPr lang="en-US" smtClean="0"/>
+              <a:rPr lang="en-US"/>
               <a:t>Second level</a:t>
             </a:r>
           </a:p>
           <a:p>
             <a:pPr lvl="2"/>
             <a:r>
-              <a:rPr lang="en-US" smtClean="0"/>
+              <a:rPr lang="en-US"/>
               <a:t>Third level</a:t>
             </a:r>
           </a:p>
           <a:p>
             <a:pPr lvl="3"/>
             <a:r>
-              <a:rPr lang="en-US" smtClean="0"/>
+              <a:rPr lang="en-US"/>
               <a:t>Fourth level</a:t>
             </a:r>
           </a:p>
           <a:p>
             <a:pPr lvl="4"/>
             <a:r>
-              <a:rPr lang="en-US" smtClean="0"/>
+              <a:rPr lang="en-US"/>
               <a:t>Fifth level</a:t>
             </a:r>
-            <a:endParaRPr lang="en-US"/>
           </a:p>
         </p:txBody>
       </p:sp>
@@ -486,7 +498,7 @@
             <a:fld id="{1D8BD707-D9CF-40AE-B4C6-C98DA3205C09}" type="datetimeFigureOut">
               <a:rPr lang="en-US" smtClean="0"/>
               <a:pPr/>
-              <a:t>8/1/2011</a:t>
+              <a:t>10/9/2026</a:t>
             </a:fld>
             <a:endParaRPr lang="en-US"/>
           </a:p>
@@ -581,10 +593,9 @@
           <a:lstStyle/>
           <a:p>
             <a:r>
-              <a:rPr lang="en-US" smtClean="0"/>
+              <a:rPr lang="en-US"/>
               <a:t>Click to edit Master title style</a:t>
             </a:r>
-            <a:endParaRPr lang="en-US"/>
           </a:p>
         </p:txBody>
       </p:sp>
@@ -610,38 +621,37 @@
           <a:p>
             <a:pPr lvl="0"/>
             <a:r>
-              <a:rPr lang="en-US" smtClean="0"/>
+              <a:rPr lang="en-US"/>
               <a:t>Click to edit Master text styles</a:t>
             </a:r>
           </a:p>
           <a:p>
             <a:pPr lvl="1"/>
             <a:r>
-              <a:rPr lang="en-US" smtClean="0"/>
+              <a:rPr lang="en-US"/>
               <a:t>Second level</a:t>
             </a:r>
           </a:p>
           <a:p>
             <a:pPr lvl="2"/>
             <a:r>
-              <a:rPr lang="en-US" smtClean="0"/>
+              <a:rPr lang="en-US"/>
               <a:t>Third level</a:t>
             </a:r>
           </a:p>
           <a:p>
             <a:pPr lvl="3"/>
             <a:r>
-              <a:rPr lang="en-US" smtClean="0"/>
+              <a:rPr lang="en-US"/>
               <a:t>Fourth level</a:t>
             </a:r>
           </a:p>
           <a:p>
             <a:pPr lvl="4"/>
             <a:r>
-              <a:rPr lang="en-US" smtClean="0"/>
+              <a:rPr lang="en-US"/>
               <a:t>Fifth level</a:t>
             </a:r>
-            <a:endParaRPr lang="en-US"/>
           </a:p>
         </p:txBody>
       </p:sp>
@@ -663,7 +673,7 @@
             <a:fld id="{1D8BD707-D9CF-40AE-B4C6-C98DA3205C09}" type="datetimeFigureOut">
               <a:rPr lang="en-US" smtClean="0"/>
               <a:pPr/>
-              <a:t>8/1/2011</a:t>
+              <a:t>10/9/2026</a:t>
             </a:fld>
             <a:endParaRPr lang="en-US"/>
           </a:p>
@@ -753,10 +763,9 @@
           <a:lstStyle/>
           <a:p>
             <a:r>
-              <a:rPr lang="en-US" smtClean="0"/>
+              <a:rPr lang="en-US"/>
               <a:t>Click to edit Master title style</a:t>
             </a:r>
-            <a:endParaRPr lang="en-US"/>
           </a:p>
         </p:txBody>
       </p:sp>
@@ -777,38 +786,37 @@
           <a:p>
             <a:pPr lvl="0"/>
             <a:r>
-              <a:rPr lang="en-US" smtClean="0"/>
+              <a:rPr lang="en-US"/>
               <a:t>Click to edit Master text styles</a:t>
             </a:r>
           </a:p>
           <a:p>
             <a:pPr lvl="1"/>
             <a:r>
-              <a:rPr lang="en-US" smtClean="0"/>
+              <a:rPr lang="en-US"/>
               <a:t>Second level</a:t>
             </a:r>
           </a:p>
           <a:p>
             <a:pPr lvl="2"/>
             <a:r>
-              <a:rPr lang="en-US" smtClean="0"/>
+              <a:rPr lang="en-US"/>
               <a:t>Third level</a:t>
             </a:r>
           </a:p>
           <a:p>
             <a:pPr lvl="3"/>
             <a:r>
-              <a:rPr lang="en-US" smtClean="0"/>
+              <a:rPr lang="en-US"/>
               <a:t>Fourth level</a:t>
             </a:r>
           </a:p>
           <a:p>
             <a:pPr lvl="4"/>
             <a:r>
-              <a:rPr lang="en-US" smtClean="0"/>
+              <a:rPr lang="en-US"/>
               <a:t>Fifth level</a:t>
             </a:r>
-            <a:endParaRPr lang="en-US"/>
           </a:p>
         </p:txBody>
       </p:sp>
@@ -830,7 +838,7 @@
             <a:fld id="{1D8BD707-D9CF-40AE-B4C6-C98DA3205C09}" type="datetimeFigureOut">
               <a:rPr lang="en-US" smtClean="0"/>
               <a:pPr/>
-              <a:t>8/1/2011</a:t>
+              <a:t>10/9/2026</a:t>
             </a:fld>
             <a:endParaRPr lang="en-US"/>
           </a:p>
@@ -929,10 +937,9 @@
           </a:lstStyle>
           <a:p>
             <a:r>
-              <a:rPr lang="en-US" smtClean="0"/>
+              <a:rPr lang="en-US"/>
               <a:t>Click to edit Master title style</a:t>
             </a:r>
-            <a:endParaRPr lang="en-US"/>
           </a:p>
         </p:txBody>
       </p:sp>
@@ -1049,7 +1056,7 @@
           <a:p>
             <a:pPr lvl="0"/>
             <a:r>
-              <a:rPr lang="en-US" smtClean="0"/>
+              <a:rPr lang="en-US"/>
               <a:t>Click to edit Master text styles</a:t>
             </a:r>
           </a:p>
@@ -1073,7 +1080,7 @@
             <a:fld id="{1D8BD707-D9CF-40AE-B4C6-C98DA3205C09}" type="datetimeFigureOut">
               <a:rPr lang="en-US" smtClean="0"/>
               <a:pPr/>
-              <a:t>8/1/2011</a:t>
+              <a:t>10/9/2026</a:t>
             </a:fld>
             <a:endParaRPr lang="en-US"/>
           </a:p>
@@ -1163,10 +1170,9 @@
           <a:lstStyle/>
           <a:p>
             <a:r>
-              <a:rPr lang="en-US" smtClean="0"/>
+              <a:rPr lang="en-US"/>
               <a:t>Click to edit Master title style</a:t>
             </a:r>
-            <a:endParaRPr lang="en-US"/>
           </a:p>
         </p:txBody>
       </p:sp>
@@ -1220,38 +1226,37 @@
           <a:p>
             <a:pPr lvl="0"/>
             <a:r>
-              <a:rPr lang="en-US" smtClean="0"/>
+              <a:rPr lang="en-US"/>
               <a:t>Click to edit Master text styles</a:t>
             </a:r>
           </a:p>
           <a:p>
             <a:pPr lvl="1"/>
             <a:r>
-              <a:rPr lang="en-US" smtClean="0"/>
+              <a:rPr lang="en-US"/>
               <a:t>Second level</a:t>
             </a:r>
           </a:p>
           <a:p>
             <a:pPr lvl="2"/>
             <a:r>
-              <a:rPr lang="en-US" smtClean="0"/>
+              <a:rPr lang="en-US"/>
               <a:t>Third level</a:t>
             </a:r>
           </a:p>
           <a:p>
             <a:pPr lvl="3"/>
             <a:r>
-              <a:rPr lang="en-US" smtClean="0"/>
+              <a:rPr lang="en-US"/>
               <a:t>Fourth level</a:t>
             </a:r>
           </a:p>
           <a:p>
             <a:pPr lvl="4"/>
             <a:r>
-              <a:rPr lang="en-US" smtClean="0"/>
+              <a:rPr lang="en-US"/>
               <a:t>Fifth level</a:t>
             </a:r>
-            <a:endParaRPr lang="en-US"/>
           </a:p>
         </p:txBody>
       </p:sp>
@@ -1305,38 +1310,37 @@
           <a:p>
             <a:pPr lvl="0"/>
             <a:r>
-              <a:rPr lang="en-US" smtClean="0"/>
+              <a:rPr lang="en-US"/>
               <a:t>Click to edit Master text styles</a:t>
             </a:r>
           </a:p>
           <a:p>
             <a:pPr lvl="1"/>
             <a:r>
-              <a:rPr lang="en-US" smtClean="0"/>
+              <a:rPr lang="en-US"/>
               <a:t>Second level</a:t>
             </a:r>
           </a:p>
           <a:p>
             <a:pPr lvl="2"/>
             <a:r>
-              <a:rPr lang="en-US" smtClean="0"/>
+              <a:rPr lang="en-US"/>
               <a:t>Third level</a:t>
             </a:r>
           </a:p>
           <a:p>
             <a:pPr lvl="3"/>
             <a:r>
-              <a:rPr lang="en-US" smtClean="0"/>
+              <a:rPr lang="en-US"/>
               <a:t>Fourth level</a:t>
             </a:r>
           </a:p>
           <a:p>
             <a:pPr lvl="4"/>
             <a:r>
-              <a:rPr lang="en-US" smtClean="0"/>
+              <a:rPr lang="en-US"/>
               <a:t>Fifth level</a:t>
             </a:r>
-            <a:endParaRPr lang="en-US"/>
           </a:p>
         </p:txBody>
       </p:sp>
@@ -1358,7 +1362,7 @@
             <a:fld id="{1D8BD707-D9CF-40AE-B4C6-C98DA3205C09}" type="datetimeFigureOut">
               <a:rPr lang="en-US" smtClean="0"/>
               <a:pPr/>
-              <a:t>8/1/2011</a:t>
+              <a:t>10/9/2026</a:t>
             </a:fld>
             <a:endParaRPr lang="en-US"/>
           </a:p>
@@ -1452,10 +1456,9 @@
           </a:lstStyle>
           <a:p>
             <a:r>
-              <a:rPr lang="en-US" smtClean="0"/>
+              <a:rPr lang="en-US"/>
               <a:t>Click to edit Master title style</a:t>
             </a:r>
-            <a:endParaRPr lang="en-US"/>
           </a:p>
         </p:txBody>
       </p:sp>
@@ -1518,7 +1521,7 @@
           <a:p>
             <a:pPr lvl="0"/>
             <a:r>
-              <a:rPr lang="en-US" smtClean="0"/>
+              <a:rPr lang="en-US"/>
               <a:t>Click to edit Master text styles</a:t>
             </a:r>
           </a:p>
@@ -1574,38 +1577,37 @@
           <a:p>
             <a:pPr lvl="0"/>
             <a:r>
-              <a:rPr lang="en-US" smtClean="0"/>
+              <a:rPr lang="en-US"/>
               <a:t>Click to edit Master text styles</a:t>
             </a:r>
           </a:p>
           <a:p>
             <a:pPr lvl="1"/>
             <a:r>
-              <a:rPr lang="en-US" smtClean="0"/>
+              <a:rPr lang="en-US"/>
               <a:t>Second level</a:t>
             </a:r>
           </a:p>
           <a:p>
             <a:pPr lvl="2"/>
             <a:r>
-              <a:rPr lang="en-US" smtClean="0"/>
+              <a:rPr lang="en-US"/>
               <a:t>Third level</a:t>
             </a:r>
           </a:p>
           <a:p>
             <a:pPr lvl="3"/>
             <a:r>
-              <a:rPr lang="en-US" smtClean="0"/>
+              <a:rPr lang="en-US"/>
               <a:t>Fourth level</a:t>
             </a:r>
           </a:p>
           <a:p>
             <a:pPr lvl="4"/>
             <a:r>
-              <a:rPr lang="en-US" smtClean="0"/>
+              <a:rPr lang="en-US"/>
               <a:t>Fifth level</a:t>
             </a:r>
-            <a:endParaRPr lang="en-US"/>
           </a:p>
         </p:txBody>
       </p:sp>
@@ -1668,7 +1670,7 @@
           <a:p>
             <a:pPr lvl="0"/>
             <a:r>
-              <a:rPr lang="en-US" smtClean="0"/>
+              <a:rPr lang="en-US"/>
               <a:t>Click to edit Master text styles</a:t>
             </a:r>
           </a:p>
@@ -1724,38 +1726,37 @@
           <a:p>
             <a:pPr lvl="0"/>
             <a:r>
-              <a:rPr lang="en-US" smtClean="0"/>
+              <a:rPr lang="en-US"/>
               <a:t>Click to edit Master text styles</a:t>
             </a:r>
           </a:p>
           <a:p>
             <a:pPr lvl="1"/>
             <a:r>
-              <a:rPr lang="en-US" smtClean="0"/>
+              <a:rPr lang="en-US"/>
               <a:t>Second level</a:t>
             </a:r>
           </a:p>
           <a:p>
             <a:pPr lvl="2"/>
             <a:r>
-              <a:rPr lang="en-US" smtClean="0"/>
+              <a:rPr lang="en-US"/>
               <a:t>Third level</a:t>
             </a:r>
           </a:p>
           <a:p>
             <a:pPr lvl="3"/>
             <a:r>
-              <a:rPr lang="en-US" smtClean="0"/>
+              <a:rPr lang="en-US"/>
               <a:t>Fourth level</a:t>
             </a:r>
           </a:p>
           <a:p>
             <a:pPr lvl="4"/>
             <a:r>
-              <a:rPr lang="en-US" smtClean="0"/>
+              <a:rPr lang="en-US"/>
               <a:t>Fifth level</a:t>
             </a:r>
-            <a:endParaRPr lang="en-US"/>
           </a:p>
         </p:txBody>
       </p:sp>
@@ -1777,7 +1778,7 @@
             <a:fld id="{1D8BD707-D9CF-40AE-B4C6-C98DA3205C09}" type="datetimeFigureOut">
               <a:rPr lang="en-US" smtClean="0"/>
               <a:pPr/>
-              <a:t>8/1/2011</a:t>
+              <a:t>10/9/2026</a:t>
             </a:fld>
             <a:endParaRPr lang="en-US"/>
           </a:p>
@@ -1867,10 +1868,9 @@
           <a:lstStyle/>
           <a:p>
             <a:r>
-              <a:rPr lang="en-US" smtClean="0"/>
+              <a:rPr lang="en-US"/>
               <a:t>Click to edit Master title style</a:t>
             </a:r>
-            <a:endParaRPr lang="en-US"/>
           </a:p>
         </p:txBody>
       </p:sp>
@@ -1892,7 +1892,7 @@
             <a:fld id="{1D8BD707-D9CF-40AE-B4C6-C98DA3205C09}" type="datetimeFigureOut">
               <a:rPr lang="en-US" smtClean="0"/>
               <a:pPr/>
-              <a:t>8/1/2011</a:t>
+              <a:t>10/9/2026</a:t>
             </a:fld>
             <a:endParaRPr lang="en-US"/>
           </a:p>
@@ -1984,7 +1984,7 @@
             <a:fld id="{1D8BD707-D9CF-40AE-B4C6-C98DA3205C09}" type="datetimeFigureOut">
               <a:rPr lang="en-US" smtClean="0"/>
               <a:pPr/>
-              <a:t>8/1/2011</a:t>
+              <a:t>10/9/2026</a:t>
             </a:fld>
             <a:endParaRPr lang="en-US"/>
           </a:p>
@@ -2083,10 +2083,9 @@
           </a:lstStyle>
           <a:p>
             <a:r>
-              <a:rPr lang="en-US" smtClean="0"/>
+              <a:rPr lang="en-US"/>
               <a:t>Click to edit Master title style</a:t>
             </a:r>
-            <a:endParaRPr lang="en-US"/>
           </a:p>
         </p:txBody>
       </p:sp>
@@ -2140,38 +2139,37 @@
           <a:p>
             <a:pPr lvl="0"/>
             <a:r>
-              <a:rPr lang="en-US" smtClean="0"/>
+              <a:rPr lang="en-US"/>
               <a:t>Click to edit Master text styles</a:t>
             </a:r>
           </a:p>
           <a:p>
             <a:pPr lvl="1"/>
             <a:r>
-              <a:rPr lang="en-US" smtClean="0"/>
+              <a:rPr lang="en-US"/>
               <a:t>Second level</a:t>
             </a:r>
           </a:p>
           <a:p>
             <a:pPr lvl="2"/>
             <a:r>
-              <a:rPr lang="en-US" smtClean="0"/>
+              <a:rPr lang="en-US"/>
               <a:t>Third level</a:t>
             </a:r>
           </a:p>
           <a:p>
             <a:pPr lvl="3"/>
             <a:r>
-              <a:rPr lang="en-US" smtClean="0"/>
+              <a:rPr lang="en-US"/>
               <a:t>Fourth level</a:t>
             </a:r>
           </a:p>
           <a:p>
             <a:pPr lvl="4"/>
             <a:r>
-              <a:rPr lang="en-US" smtClean="0"/>
+              <a:rPr lang="en-US"/>
               <a:t>Fifth level</a:t>
             </a:r>
-            <a:endParaRPr lang="en-US"/>
           </a:p>
         </p:txBody>
       </p:sp>
@@ -2234,7 +2232,7 @@
           <a:p>
             <a:pPr lvl="0"/>
             <a:r>
-              <a:rPr lang="en-US" smtClean="0"/>
+              <a:rPr lang="en-US"/>
               <a:t>Click to edit Master text styles</a:t>
             </a:r>
           </a:p>
@@ -2258,7 +2256,7 @@
             <a:fld id="{1D8BD707-D9CF-40AE-B4C6-C98DA3205C09}" type="datetimeFigureOut">
               <a:rPr lang="en-US" smtClean="0"/>
               <a:pPr/>
-              <a:t>8/1/2011</a:t>
+              <a:t>10/9/2026</a:t>
             </a:fld>
             <a:endParaRPr lang="en-US"/>
           </a:p>
@@ -2357,10 +2355,9 @@
           </a:lstStyle>
           <a:p>
             <a:r>
-              <a:rPr lang="en-US" smtClean="0"/>
+              <a:rPr lang="en-US"/>
               <a:t>Click to edit Master title style</a:t>
             </a:r>
-            <a:endParaRPr lang="en-US"/>
           </a:p>
         </p:txBody>
       </p:sp>
@@ -2484,7 +2481,7 @@
           <a:p>
             <a:pPr lvl="0"/>
             <a:r>
-              <a:rPr lang="en-US" smtClean="0"/>
+              <a:rPr lang="en-US"/>
               <a:t>Click to edit Master text styles</a:t>
             </a:r>
           </a:p>
@@ -2508,7 +2505,7 @@
             <a:fld id="{1D8BD707-D9CF-40AE-B4C6-C98DA3205C09}" type="datetimeFigureOut">
               <a:rPr lang="en-US" smtClean="0"/>
               <a:pPr/>
-              <a:t>8/1/2011</a:t>
+              <a:t>10/9/2026</a:t>
             </a:fld>
             <a:endParaRPr lang="en-US"/>
           </a:p>
@@ -2613,10 +2610,9 @@
           <a:lstStyle/>
           <a:p>
             <a:r>
-              <a:rPr lang="en-US" smtClean="0"/>
+              <a:rPr lang="en-US"/>
               <a:t>Click to edit Master title style</a:t>
             </a:r>
-            <a:endParaRPr lang="en-US"/>
           </a:p>
         </p:txBody>
       </p:sp>
@@ -2647,38 +2643,37 @@
           <a:p>
             <a:pPr lvl="0"/>
             <a:r>
-              <a:rPr lang="en-US" smtClean="0"/>
+              <a:rPr lang="en-US"/>
               <a:t>Click to edit Master text styles</a:t>
             </a:r>
           </a:p>
           <a:p>
             <a:pPr lvl="1"/>
             <a:r>
-              <a:rPr lang="en-US" smtClean="0"/>
+              <a:rPr lang="en-US"/>
               <a:t>Second level</a:t>
             </a:r>
           </a:p>
           <a:p>
             <a:pPr lvl="2"/>
             <a:r>
-              <a:rPr lang="en-US" smtClean="0"/>
+              <a:rPr lang="en-US"/>
               <a:t>Third level</a:t>
             </a:r>
           </a:p>
           <a:p>
             <a:pPr lvl="3"/>
             <a:r>
-              <a:rPr lang="en-US" smtClean="0"/>
+              <a:rPr lang="en-US"/>
               <a:t>Fourth level</a:t>
             </a:r>
           </a:p>
           <a:p>
             <a:pPr lvl="4"/>
             <a:r>
-              <a:rPr lang="en-US" smtClean="0"/>
+              <a:rPr lang="en-US"/>
               <a:t>Fifth level</a:t>
             </a:r>
-            <a:endParaRPr lang="en-US"/>
           </a:p>
         </p:txBody>
       </p:sp>
@@ -2718,7 +2713,7 @@
             <a:fld id="{1D8BD707-D9CF-40AE-B4C6-C98DA3205C09}" type="datetimeFigureOut">
               <a:rPr lang="en-US" smtClean="0"/>
               <a:pPr/>
-              <a:t>8/1/2011</a:t>
+              <a:t>10/9/2026</a:t>
             </a:fld>
             <a:endParaRPr lang="en-US"/>
           </a:p>
@@ -3073,13 +3068,14 @@
 </file>
 
 <file path=ppt/slides/slide1.xml><?xml version="1.0" encoding="utf-8"?>
-<p:sld xmlns:p="http://schemas.openxmlformats.org/presentationml/2006/main" xmlns:a="http://schemas.openxmlformats.org/drawingml/2006/main" xmlns:r="http://schemas.openxmlformats.org/officeDocument/2006/relationships">
+<p:sld xmlns:a="http://schemas.openxmlformats.org/drawingml/2006/main" xmlns:r="http://schemas.openxmlformats.org/officeDocument/2006/relationships" xmlns:p="http://schemas.openxmlformats.org/presentationml/2006/main">
   <p:cSld>
     <p:bg>
       <p:bgPr>
         <a:solidFill>
           <a:srgbClr val="FDFBFB"/>
         </a:solidFill>
+        <a:effectLst/>
       </p:bgPr>
     </p:bg>
     <p:spTree>
@@ -3098,12 +3094,12 @@
       </p:grpSpPr>
       <p:grpSp>
         <p:nvGrpSpPr>
-          <p:cNvPr name="Group 2" id="2"/>
+          <p:cNvPr id="2" name="Group 2"/>
           <p:cNvGrpSpPr/>
           <p:nvPr/>
         </p:nvGrpSpPr>
         <p:grpSpPr>
-          <a:xfrm rot="0">
+          <a:xfrm>
             <a:off x="12974764" y="-207071"/>
             <a:ext cx="3086100" cy="11299900"/>
             <a:chOff x="0" y="0"/>
@@ -3112,12 +3108,12 @@
         </p:grpSpPr>
         <p:sp>
           <p:nvSpPr>
-            <p:cNvPr name="Freeform 3" id="3"/>
+            <p:cNvPr id="3" name="Freeform 3"/>
             <p:cNvSpPr/>
             <p:nvPr/>
           </p:nvSpPr>
           <p:spPr>
-            <a:xfrm flipH="false" flipV="false" rot="0">
+            <a:xfrm>
               <a:off x="0" y="0"/>
               <a:ext cx="812800" cy="2976105"/>
             </a:xfrm>
@@ -3126,9 +3122,9 @@
               <a:gdLst/>
               <a:ahLst/>
               <a:cxnLst/>
-              <a:rect r="r" b="b" t="t" l="l"/>
+              <a:rect l="l" t="t" r="r" b="b"/>
               <a:pathLst>
-                <a:path h="2976105" w="812800">
+                <a:path w="812800" h="2976105">
                   <a:moveTo>
                     <a:pt x="0" y="0"/>
                   </a:moveTo>
@@ -3152,8 +3148,8 @@
         </p:sp>
         <p:sp>
           <p:nvSpPr>
-            <p:cNvPr name="TextBox 4" id="4"/>
-            <p:cNvSpPr txBox="true"/>
+            <p:cNvPr id="4" name="TextBox 4"/>
+            <p:cNvSpPr txBox="1"/>
             <p:nvPr/>
           </p:nvSpPr>
           <p:spPr>
@@ -3166,7 +3162,7 @@
             </a:prstGeom>
           </p:spPr>
           <p:txBody>
-            <a:bodyPr anchor="ctr" rtlCol="false" tIns="50800" lIns="50800" bIns="50800" rIns="50800"/>
+            <a:bodyPr lIns="50800" tIns="50800" rIns="50800" bIns="50800" rtlCol="0" anchor="ctr"/>
             <a:lstStyle/>
             <a:p>
               <a:pPr algn="ctr">
@@ -3174,18 +3170,19 @@
                   <a:spcPts val="2859"/>
                 </a:lnSpc>
               </a:pPr>
+              <a:endParaRPr/>
             </a:p>
           </p:txBody>
         </p:sp>
       </p:grpSp>
       <p:sp>
         <p:nvSpPr>
-          <p:cNvPr name="Freeform 5" id="5"/>
+          <p:cNvPr id="5" name="Freeform 5"/>
           <p:cNvSpPr/>
           <p:nvPr/>
         </p:nvSpPr>
         <p:spPr>
-          <a:xfrm flipH="false" flipV="false" rot="0">
+          <a:xfrm>
             <a:off x="16384715" y="9009597"/>
             <a:ext cx="3806571" cy="2083232"/>
           </a:xfrm>
@@ -3194,9 +3191,9 @@
             <a:gdLst/>
             <a:ahLst/>
             <a:cxnLst/>
-            <a:rect r="r" b="b" t="t" l="l"/>
+            <a:rect l="l" t="t" r="r" b="b"/>
             <a:pathLst>
-              <a:path h="2083232" w="3806571">
+              <a:path w="3806571" h="2083232">
                 <a:moveTo>
                   <a:pt x="0" y="0"/>
                 </a:moveTo>
@@ -3217,27 +3214,27 @@
             </a:pathLst>
           </a:custGeom>
           <a:blipFill>
-            <a:blip r:embed="rId2">
+            <a:blip>
               <a:extLst>
                 <a:ext uri="{96DAC541-7B7A-43D3-8B79-37D633B846F1}">
-                  <asvg:svgBlip xmlns:asvg="http://schemas.microsoft.com/office/drawing/2016/SVG/main" r:embed="rId3"/>
+                  <asvg:svgBlip xmlns:asvg="http://schemas.microsoft.com/office/drawing/2016/SVG/main" r:embed="rId2"/>
                 </a:ext>
               </a:extLst>
             </a:blip>
             <a:stretch>
-              <a:fillRect l="0" t="0" r="0" b="0"/>
+              <a:fillRect/>
             </a:stretch>
           </a:blipFill>
         </p:spPr>
       </p:sp>
       <p:grpSp>
         <p:nvGrpSpPr>
-          <p:cNvPr name="Group 6" id="6"/>
+          <p:cNvPr id="6" name="Group 6"/>
           <p:cNvGrpSpPr/>
           <p:nvPr/>
         </p:nvGrpSpPr>
         <p:grpSpPr>
-          <a:xfrm rot="0">
+          <a:xfrm>
             <a:off x="-1543050" y="-558218"/>
             <a:ext cx="3086100" cy="11299900"/>
             <a:chOff x="0" y="0"/>
@@ -3246,12 +3243,12 @@
         </p:grpSpPr>
         <p:sp>
           <p:nvSpPr>
-            <p:cNvPr name="Freeform 7" id="7"/>
+            <p:cNvPr id="7" name="Freeform 7"/>
             <p:cNvSpPr/>
             <p:nvPr/>
           </p:nvSpPr>
           <p:spPr>
-            <a:xfrm flipH="false" flipV="false" rot="0">
+            <a:xfrm>
               <a:off x="0" y="0"/>
               <a:ext cx="812800" cy="2976105"/>
             </a:xfrm>
@@ -3260,9 +3257,9 @@
               <a:gdLst/>
               <a:ahLst/>
               <a:cxnLst/>
-              <a:rect r="r" b="b" t="t" l="l"/>
+              <a:rect l="l" t="t" r="r" b="b"/>
               <a:pathLst>
-                <a:path h="2976105" w="812800">
+                <a:path w="812800" h="2976105">
                   <a:moveTo>
                     <a:pt x="0" y="0"/>
                   </a:moveTo>
@@ -3286,8 +3283,8 @@
         </p:sp>
         <p:sp>
           <p:nvSpPr>
-            <p:cNvPr name="TextBox 8" id="8"/>
-            <p:cNvSpPr txBox="true"/>
+            <p:cNvPr id="8" name="TextBox 8"/>
+            <p:cNvSpPr txBox="1"/>
             <p:nvPr/>
           </p:nvSpPr>
           <p:spPr>
@@ -3300,7 +3297,7 @@
             </a:prstGeom>
           </p:spPr>
           <p:txBody>
-            <a:bodyPr anchor="ctr" rtlCol="false" tIns="50800" lIns="50800" bIns="50800" rIns="50800"/>
+            <a:bodyPr lIns="50800" tIns="50800" rIns="50800" bIns="50800" rtlCol="0" anchor="ctr"/>
             <a:lstStyle/>
             <a:p>
               <a:pPr algn="ctr">
@@ -3308,18 +3305,19 @@
                   <a:spcPts val="2859"/>
                 </a:lnSpc>
               </a:pPr>
+              <a:endParaRPr/>
             </a:p>
           </p:txBody>
         </p:sp>
       </p:grpSp>
       <p:grpSp>
         <p:nvGrpSpPr>
-          <p:cNvPr name="Group 9" id="9"/>
+          <p:cNvPr id="9" name="Group 9"/>
           <p:cNvGrpSpPr/>
           <p:nvPr/>
         </p:nvGrpSpPr>
         <p:grpSpPr>
-          <a:xfrm rot="0">
+          <a:xfrm>
             <a:off x="1227773" y="4163622"/>
             <a:ext cx="110236" cy="2818996"/>
             <a:chOff x="0" y="0"/>
@@ -3328,12 +3326,12 @@
         </p:grpSpPr>
         <p:sp>
           <p:nvSpPr>
-            <p:cNvPr name="Freeform 10" id="10"/>
+            <p:cNvPr id="10" name="Freeform 10"/>
             <p:cNvSpPr/>
             <p:nvPr/>
           </p:nvSpPr>
           <p:spPr>
-            <a:xfrm flipH="false" flipV="false" rot="0">
+            <a:xfrm>
               <a:off x="0" y="0"/>
               <a:ext cx="26312" cy="672855"/>
             </a:xfrm>
@@ -3342,9 +3340,9 @@
               <a:gdLst/>
               <a:ahLst/>
               <a:cxnLst/>
-              <a:rect r="r" b="b" t="t" l="l"/>
+              <a:rect l="l" t="t" r="r" b="b"/>
               <a:pathLst>
-                <a:path h="672855" w="26312">
+                <a:path w="26312" h="672855">
                   <a:moveTo>
                     <a:pt x="0" y="0"/>
                   </a:moveTo>
@@ -3368,8 +3366,8 @@
         </p:sp>
         <p:sp>
           <p:nvSpPr>
-            <p:cNvPr name="TextBox 11" id="11"/>
-            <p:cNvSpPr txBox="true"/>
+            <p:cNvPr id="11" name="TextBox 11"/>
+            <p:cNvSpPr txBox="1"/>
             <p:nvPr/>
           </p:nvSpPr>
           <p:spPr>
@@ -3382,7 +3380,7 @@
             </a:prstGeom>
           </p:spPr>
           <p:txBody>
-            <a:bodyPr anchor="ctr" rtlCol="false" tIns="50800" lIns="50800" bIns="50800" rIns="50800"/>
+            <a:bodyPr lIns="50800" tIns="50800" rIns="50800" bIns="50800" rtlCol="0" anchor="ctr"/>
             <a:lstStyle/>
             <a:p>
               <a:pPr algn="ctr">
@@ -3390,18 +3388,19 @@
                   <a:spcPts val="2859"/>
                 </a:lnSpc>
               </a:pPr>
+              <a:endParaRPr/>
             </a:p>
           </p:txBody>
         </p:sp>
       </p:grpSp>
       <p:sp>
         <p:nvSpPr>
-          <p:cNvPr name="Freeform 12" id="12"/>
+          <p:cNvPr id="12" name="Freeform 12"/>
           <p:cNvSpPr/>
           <p:nvPr/>
         </p:nvSpPr>
         <p:spPr>
-          <a:xfrm flipH="false" flipV="false" rot="0">
+          <a:xfrm>
             <a:off x="-2777871" y="-207071"/>
             <a:ext cx="3806571" cy="2083232"/>
           </a:xfrm>
@@ -3410,9 +3409,9 @@
             <a:gdLst/>
             <a:ahLst/>
             <a:cxnLst/>
-            <a:rect r="r" b="b" t="t" l="l"/>
+            <a:rect l="l" t="t" r="r" b="b"/>
             <a:pathLst>
-              <a:path h="2083232" w="3806571">
+              <a:path w="3806571" h="2083232">
                 <a:moveTo>
                   <a:pt x="0" y="0"/>
                 </a:moveTo>
@@ -3433,27 +3432,27 @@
             </a:pathLst>
           </a:custGeom>
           <a:blipFill>
-            <a:blip r:embed="rId4">
+            <a:blip>
               <a:extLst>
                 <a:ext uri="{96DAC541-7B7A-43D3-8B79-37D633B846F1}">
-                  <asvg:svgBlip xmlns:asvg="http://schemas.microsoft.com/office/drawing/2016/SVG/main" r:embed="rId5"/>
+                  <asvg:svgBlip xmlns:asvg="http://schemas.microsoft.com/office/drawing/2016/SVG/main" r:embed="rId3"/>
                 </a:ext>
               </a:extLst>
             </a:blip>
             <a:stretch>
-              <a:fillRect l="0" t="0" r="0" b="0"/>
+              <a:fillRect/>
             </a:stretch>
           </a:blipFill>
         </p:spPr>
       </p:sp>
       <p:sp>
         <p:nvSpPr>
-          <p:cNvPr name="TextBox 13" id="13"/>
-          <p:cNvSpPr txBox="true"/>
+          <p:cNvPr id="13" name="TextBox 13"/>
+          <p:cNvSpPr txBox="1"/>
           <p:nvPr/>
         </p:nvSpPr>
         <p:spPr>
-          <a:xfrm rot="0">
+          <a:xfrm>
             <a:off x="2418387" y="3800041"/>
             <a:ext cx="7766110" cy="1834906"/>
           </a:xfrm>
@@ -3462,7 +3461,7 @@
           </a:prstGeom>
         </p:spPr>
         <p:txBody>
-          <a:bodyPr anchor="t" rtlCol="false" tIns="0" lIns="0" bIns="0" rIns="0">
+          <a:bodyPr lIns="0" tIns="0" rIns="0" bIns="0" rtlCol="0" anchor="t">
             <a:spAutoFit/>
           </a:bodyPr>
           <a:lstStyle/>
@@ -3489,12 +3488,12 @@
       </p:sp>
       <p:sp>
         <p:nvSpPr>
-          <p:cNvPr name="TextBox 14" id="14"/>
-          <p:cNvSpPr txBox="true"/>
+          <p:cNvPr id="14" name="TextBox 14"/>
+          <p:cNvSpPr txBox="1"/>
           <p:nvPr/>
         </p:nvSpPr>
         <p:spPr>
-          <a:xfrm rot="0">
+          <a:xfrm>
             <a:off x="2418387" y="821600"/>
             <a:ext cx="8964949" cy="1976512"/>
           </a:xfrm>
@@ -3503,12 +3502,12 @@
           </a:prstGeom>
         </p:spPr>
         <p:txBody>
-          <a:bodyPr anchor="t" rtlCol="false" tIns="0" lIns="0" bIns="0" rIns="0">
+          <a:bodyPr lIns="0" tIns="0" rIns="0" bIns="0" rtlCol="0" anchor="t">
             <a:spAutoFit/>
           </a:bodyPr>
           <a:lstStyle/>
           <a:p>
-            <a:pPr algn="l" marL="0" indent="0" lvl="0">
+            <a:pPr marL="0" lvl="0" indent="0" algn="l">
               <a:lnSpc>
                 <a:spcPts val="7757"/>
               </a:lnSpc>
@@ -3517,7 +3516,7 @@
               </a:spcBef>
             </a:pPr>
             <a:r>
-              <a:rPr lang="en-US" b="true" sz="5621" spc="28">
+              <a:rPr lang="en-US" sz="5621" b="1" spc="28">
                 <a:solidFill>
                   <a:srgbClr val="1C5739"/>
                 </a:solidFill>
@@ -3533,12 +3532,12 @@
       </p:sp>
       <p:sp>
         <p:nvSpPr>
-          <p:cNvPr name="TextBox 15" id="15"/>
-          <p:cNvSpPr txBox="true"/>
+          <p:cNvPr id="15" name="TextBox 15"/>
+          <p:cNvSpPr txBox="1"/>
           <p:nvPr/>
         </p:nvSpPr>
         <p:spPr>
-          <a:xfrm rot="0">
+          <a:xfrm>
             <a:off x="2418387" y="6682215"/>
             <a:ext cx="7766110" cy="1770771"/>
           </a:xfrm>
@@ -3547,7 +3546,7 @@
           </a:prstGeom>
         </p:spPr>
         <p:txBody>
-          <a:bodyPr anchor="t" rtlCol="false" tIns="0" lIns="0" bIns="0" rIns="0">
+          <a:bodyPr lIns="0" tIns="0" rIns="0" bIns="0" rtlCol="0" anchor="t">
             <a:spAutoFit/>
           </a:bodyPr>
           <a:lstStyle/>
@@ -3558,7 +3557,7 @@
               </a:lnSpc>
             </a:pPr>
             <a:r>
-              <a:rPr lang="en-US" b="true" sz="3409" spc="170">
+              <a:rPr lang="en-US" sz="3409" b="1" spc="170">
                 <a:solidFill>
                   <a:srgbClr val="1C5739"/>
                 </a:solidFill>
@@ -3577,7 +3576,7 @@
               </a:lnSpc>
             </a:pPr>
             <a:r>
-              <a:rPr lang="en-US" b="true" sz="3409" spc="170">
+              <a:rPr lang="en-US" sz="3409" b="1" spc="170">
                 <a:solidFill>
                   <a:srgbClr val="1C5739"/>
                 </a:solidFill>
@@ -3596,7 +3595,7 @@
               </a:lnSpc>
             </a:pPr>
             <a:r>
-              <a:rPr lang="en-US" b="true" sz="3409" spc="170">
+              <a:rPr lang="en-US" sz="3409" b="1" spc="170">
                 <a:solidFill>
                   <a:srgbClr val="1C5739"/>
                 </a:solidFill>
@@ -3619,13 +3618,14 @@
 </file>
 
 <file path=ppt/slides/slide2.xml><?xml version="1.0" encoding="utf-8"?>
-<p:sld xmlns:p="http://schemas.openxmlformats.org/presentationml/2006/main" xmlns:a="http://schemas.openxmlformats.org/drawingml/2006/main" xmlns:r="http://schemas.openxmlformats.org/officeDocument/2006/relationships">
+<p:sld xmlns:a="http://schemas.openxmlformats.org/drawingml/2006/main" xmlns:r="http://schemas.openxmlformats.org/officeDocument/2006/relationships" xmlns:p="http://schemas.openxmlformats.org/presentationml/2006/main">
   <p:cSld>
     <p:bg>
       <p:bgPr>
         <a:solidFill>
           <a:srgbClr val="FDFBFB"/>
         </a:solidFill>
+        <a:effectLst/>
       </p:bgPr>
     </p:bg>
     <p:spTree>
@@ -3644,12 +3644,12 @@
       </p:grpSpPr>
       <p:grpSp>
         <p:nvGrpSpPr>
-          <p:cNvPr name="Group 2" id="2"/>
+          <p:cNvPr id="2" name="Group 2"/>
           <p:cNvGrpSpPr/>
           <p:nvPr/>
         </p:nvGrpSpPr>
         <p:grpSpPr>
-          <a:xfrm rot="0">
+          <a:xfrm>
             <a:off x="-1543050" y="-558218"/>
             <a:ext cx="3086100" cy="11299900"/>
             <a:chOff x="0" y="0"/>
@@ -3658,12 +3658,12 @@
         </p:grpSpPr>
         <p:sp>
           <p:nvSpPr>
-            <p:cNvPr name="Freeform 3" id="3"/>
+            <p:cNvPr id="3" name="Freeform 3"/>
             <p:cNvSpPr/>
             <p:nvPr/>
           </p:nvSpPr>
           <p:spPr>
-            <a:xfrm flipH="false" flipV="false" rot="0">
+            <a:xfrm>
               <a:off x="0" y="0"/>
               <a:ext cx="812800" cy="2976105"/>
             </a:xfrm>
@@ -3672,9 +3672,9 @@
               <a:gdLst/>
               <a:ahLst/>
               <a:cxnLst/>
-              <a:rect r="r" b="b" t="t" l="l"/>
+              <a:rect l="l" t="t" r="r" b="b"/>
               <a:pathLst>
-                <a:path h="2976105" w="812800">
+                <a:path w="812800" h="2976105">
                   <a:moveTo>
                     <a:pt x="0" y="0"/>
                   </a:moveTo>
@@ -3698,8 +3698,8 @@
         </p:sp>
         <p:sp>
           <p:nvSpPr>
-            <p:cNvPr name="TextBox 4" id="4"/>
-            <p:cNvSpPr txBox="true"/>
+            <p:cNvPr id="4" name="TextBox 4"/>
+            <p:cNvSpPr txBox="1"/>
             <p:nvPr/>
           </p:nvSpPr>
           <p:spPr>
@@ -3712,7 +3712,7 @@
             </a:prstGeom>
           </p:spPr>
           <p:txBody>
-            <a:bodyPr anchor="ctr" rtlCol="false" tIns="50800" lIns="50800" bIns="50800" rIns="50800"/>
+            <a:bodyPr lIns="50800" tIns="50800" rIns="50800" bIns="50800" rtlCol="0" anchor="ctr"/>
             <a:lstStyle/>
             <a:p>
               <a:pPr algn="ctr">
@@ -3720,18 +3720,19 @@
                   <a:spcPts val="2859"/>
                 </a:lnSpc>
               </a:pPr>
+              <a:endParaRPr/>
             </a:p>
           </p:txBody>
         </p:sp>
       </p:grpSp>
       <p:grpSp>
         <p:nvGrpSpPr>
-          <p:cNvPr name="Group 5" id="5"/>
+          <p:cNvPr id="5" name="Group 5"/>
           <p:cNvGrpSpPr/>
           <p:nvPr/>
         </p:nvGrpSpPr>
         <p:grpSpPr>
-          <a:xfrm rot="0">
+          <a:xfrm>
             <a:off x="9590242" y="587161"/>
             <a:ext cx="8011958" cy="9423929"/>
             <a:chOff x="0" y="0"/>
@@ -3740,12 +3741,12 @@
         </p:grpSpPr>
         <p:sp>
           <p:nvSpPr>
-            <p:cNvPr name="Freeform 6" id="6"/>
+            <p:cNvPr id="6" name="Freeform 6"/>
             <p:cNvSpPr/>
             <p:nvPr/>
           </p:nvSpPr>
           <p:spPr>
-            <a:xfrm flipH="false" flipV="false" rot="0">
+            <a:xfrm>
               <a:off x="0" y="0"/>
               <a:ext cx="2110145" cy="2482022"/>
             </a:xfrm>
@@ -3754,9 +3755,9 @@
               <a:gdLst/>
               <a:ahLst/>
               <a:cxnLst/>
-              <a:rect r="r" b="b" t="t" l="l"/>
+              <a:rect l="l" t="t" r="r" b="b"/>
               <a:pathLst>
-                <a:path h="2482022" w="2110145">
+                <a:path w="2110145" h="2482022">
                   <a:moveTo>
                     <a:pt x="0" y="0"/>
                   </a:moveTo>
@@ -3780,8 +3781,8 @@
         </p:sp>
         <p:sp>
           <p:nvSpPr>
-            <p:cNvPr name="TextBox 7" id="7"/>
-            <p:cNvSpPr txBox="true"/>
+            <p:cNvPr id="7" name="TextBox 7"/>
+            <p:cNvSpPr txBox="1"/>
             <p:nvPr/>
           </p:nvSpPr>
           <p:spPr>
@@ -3794,7 +3795,7 @@
             </a:prstGeom>
           </p:spPr>
           <p:txBody>
-            <a:bodyPr anchor="ctr" rtlCol="false" tIns="50800" lIns="50800" bIns="50800" rIns="50800"/>
+            <a:bodyPr lIns="50800" tIns="50800" rIns="50800" bIns="50800" rtlCol="0" anchor="ctr"/>
             <a:lstStyle/>
             <a:p>
               <a:pPr algn="ctr">
@@ -3802,18 +3803,19 @@
                   <a:spcPts val="2859"/>
                 </a:lnSpc>
               </a:pPr>
+              <a:endParaRPr/>
             </a:p>
           </p:txBody>
         </p:sp>
       </p:grpSp>
       <p:sp>
         <p:nvSpPr>
-          <p:cNvPr name="Freeform 8" id="8"/>
+          <p:cNvPr id="8" name="Freeform 8"/>
           <p:cNvSpPr/>
           <p:nvPr/>
         </p:nvSpPr>
         <p:spPr>
-          <a:xfrm flipH="false" flipV="false" rot="0">
+          <a:xfrm>
             <a:off x="15698915" y="8697813"/>
             <a:ext cx="3806571" cy="2083232"/>
           </a:xfrm>
@@ -3822,9 +3824,9 @@
             <a:gdLst/>
             <a:ahLst/>
             <a:cxnLst/>
-            <a:rect r="r" b="b" t="t" l="l"/>
+            <a:rect l="l" t="t" r="r" b="b"/>
             <a:pathLst>
-              <a:path h="2083232" w="3806571">
+              <a:path w="3806571" h="2083232">
                 <a:moveTo>
                   <a:pt x="0" y="0"/>
                 </a:moveTo>
@@ -3845,27 +3847,27 @@
             </a:pathLst>
           </a:custGeom>
           <a:blipFill>
-            <a:blip r:embed="rId2">
+            <a:blip>
               <a:extLst>
                 <a:ext uri="{96DAC541-7B7A-43D3-8B79-37D633B846F1}">
-                  <asvg:svgBlip xmlns:asvg="http://schemas.microsoft.com/office/drawing/2016/SVG/main" r:embed="rId3"/>
+                  <asvg:svgBlip xmlns:asvg="http://schemas.microsoft.com/office/drawing/2016/SVG/main" r:embed="rId2"/>
                 </a:ext>
               </a:extLst>
             </a:blip>
             <a:stretch>
-              <a:fillRect l="0" t="0" r="0" b="0"/>
+              <a:fillRect/>
             </a:stretch>
           </a:blipFill>
         </p:spPr>
       </p:sp>
       <p:sp>
         <p:nvSpPr>
-          <p:cNvPr name="TextBox 9" id="9"/>
-          <p:cNvSpPr txBox="true"/>
+          <p:cNvPr id="9" name="TextBox 9"/>
+          <p:cNvSpPr txBox="1"/>
           <p:nvPr/>
         </p:nvSpPr>
         <p:spPr>
-          <a:xfrm rot="0">
+          <a:xfrm>
             <a:off x="1774233" y="990766"/>
             <a:ext cx="8115165" cy="826720"/>
           </a:xfrm>
@@ -3874,7 +3876,7 @@
           </a:prstGeom>
         </p:spPr>
         <p:txBody>
-          <a:bodyPr anchor="t" rtlCol="false" tIns="0" lIns="0" bIns="0" rIns="0">
+          <a:bodyPr lIns="0" tIns="0" rIns="0" bIns="0" rtlCol="0" anchor="t">
             <a:spAutoFit/>
           </a:bodyPr>
           <a:lstStyle/>
@@ -3885,7 +3887,7 @@
               </a:lnSpc>
             </a:pPr>
             <a:r>
-              <a:rPr lang="en-US" sz="4668" spc="457" b="true">
+              <a:rPr lang="en-US" sz="4668" b="1" spc="457">
                 <a:solidFill>
                   <a:srgbClr val="231F20"/>
                 </a:solidFill>
@@ -3901,12 +3903,12 @@
       </p:sp>
       <p:sp>
         <p:nvSpPr>
-          <p:cNvPr name="TextBox 10" id="10"/>
-          <p:cNvSpPr txBox="true"/>
+          <p:cNvPr id="10" name="TextBox 10"/>
+          <p:cNvSpPr txBox="1"/>
           <p:nvPr/>
         </p:nvSpPr>
         <p:spPr>
-          <a:xfrm rot="0">
+          <a:xfrm>
             <a:off x="1926472" y="2291833"/>
             <a:ext cx="6951281" cy="6654801"/>
           </a:xfrm>
@@ -3915,7 +3917,7 @@
           </a:prstGeom>
         </p:spPr>
         <p:txBody>
-          <a:bodyPr anchor="t" rtlCol="false" tIns="0" lIns="0" bIns="0" rIns="0">
+          <a:bodyPr lIns="0" tIns="0" rIns="0" bIns="0" rtlCol="0" anchor="t">
             <a:spAutoFit/>
           </a:bodyPr>
           <a:lstStyle/>
@@ -3926,7 +3928,7 @@
               </a:lnSpc>
             </a:pPr>
             <a:r>
-              <a:rPr lang="en-US" sz="2699" spc="156" b="true">
+              <a:rPr lang="en-US" sz="2699" b="1" spc="156">
                 <a:solidFill>
                   <a:srgbClr val="231F20"/>
                 </a:solidFill>
@@ -3939,7 +3941,7 @@
             </a:r>
           </a:p>
           <a:p>
-            <a:pPr algn="just" marL="474979" indent="-237490" lvl="1">
+            <a:pPr marL="474979" lvl="1" indent="-237490" algn="just">
               <a:lnSpc>
                 <a:spcPts val="3981"/>
               </a:lnSpc>
@@ -3947,7 +3949,7 @@
               <a:buChar char="•"/>
             </a:pPr>
             <a:r>
-              <a:rPr lang="en-US" b="true" sz="2199" spc="127">
+              <a:rPr lang="en-US" sz="2199" b="1" spc="127">
                 <a:solidFill>
                   <a:srgbClr val="231F20"/>
                 </a:solidFill>
@@ -3968,23 +3970,11 @@
                 <a:cs typeface="Open Sauce"/>
                 <a:sym typeface="Open Sauce"/>
               </a:rPr>
-              <a:t>Healthcare FWA costs ins</a:t>
-            </a:r>
-            <a:r>
-              <a:rPr lang="en-US" sz="2199" spc="127">
-                <a:solidFill>
-                  <a:srgbClr val="231F20"/>
-                </a:solidFill>
-                <a:latin typeface="Open Sauce"/>
-                <a:ea typeface="Open Sauce"/>
-                <a:cs typeface="Open Sauce"/>
-                <a:sym typeface="Open Sauce"/>
-              </a:rPr>
-              <a:t>urance providers billions annually due to undetected billing anomalies. </a:t>
-            </a:r>
-          </a:p>
-          <a:p>
-            <a:pPr algn="just" marL="474979" indent="-237490" lvl="1">
+              <a:t>Healthcare FWA costs insurance providers billions annually due to undetected billing anomalies. </a:t>
+            </a:r>
+          </a:p>
+          <a:p>
+            <a:pPr marL="474979" lvl="1" indent="-237490" algn="just">
               <a:lnSpc>
                 <a:spcPts val="3981"/>
               </a:lnSpc>
@@ -3992,7 +3982,7 @@
               <a:buChar char="•"/>
             </a:pPr>
             <a:r>
-              <a:rPr lang="en-US" b="true" sz="2199" spc="127">
+              <a:rPr lang="en-US" sz="2199" b="1" spc="127">
                 <a:solidFill>
                   <a:srgbClr val="231F20"/>
                 </a:solidFill>
@@ -4017,7 +4007,7 @@
             </a:r>
           </a:p>
           <a:p>
-            <a:pPr algn="just" marL="474979" indent="-237490" lvl="1">
+            <a:pPr marL="474979" lvl="1" indent="-237490" algn="just">
               <a:lnSpc>
                 <a:spcPts val="3981"/>
               </a:lnSpc>
@@ -4025,7 +4015,7 @@
               <a:buChar char="•"/>
             </a:pPr>
             <a:r>
-              <a:rPr lang="en-US" b="true" sz="2199" spc="127">
+              <a:rPr lang="en-US" sz="2199" b="1" spc="127">
                 <a:solidFill>
                   <a:srgbClr val="231F20"/>
                 </a:solidFill>
@@ -4055,17 +4045,26 @@
                 <a:spcPts val="4162"/>
               </a:lnSpc>
             </a:pPr>
+            <a:endParaRPr lang="en-US" sz="2199" spc="127">
+              <a:solidFill>
+                <a:srgbClr val="231F20"/>
+              </a:solidFill>
+              <a:latin typeface="Open Sauce"/>
+              <a:ea typeface="Open Sauce"/>
+              <a:cs typeface="Open Sauce"/>
+              <a:sym typeface="Open Sauce"/>
+            </a:endParaRPr>
           </a:p>
         </p:txBody>
       </p:sp>
       <p:sp>
         <p:nvSpPr>
-          <p:cNvPr name="TextBox 11" id="11"/>
-          <p:cNvSpPr txBox="true"/>
+          <p:cNvPr id="11" name="TextBox 11"/>
+          <p:cNvSpPr txBox="1"/>
           <p:nvPr/>
         </p:nvSpPr>
         <p:spPr>
-          <a:xfrm rot="0">
+          <a:xfrm>
             <a:off x="10120581" y="1863050"/>
             <a:ext cx="6951281" cy="7036118"/>
           </a:xfrm>
@@ -4074,12 +4073,12 @@
           </a:prstGeom>
         </p:spPr>
         <p:txBody>
-          <a:bodyPr anchor="t" rtlCol="false" tIns="0" lIns="0" bIns="0" rIns="0">
+          <a:bodyPr lIns="0" tIns="0" rIns="0" bIns="0" rtlCol="0" anchor="t">
             <a:spAutoFit/>
           </a:bodyPr>
           <a:lstStyle/>
           <a:p>
-            <a:pPr algn="just" marL="474979" indent="-237490" lvl="1">
+            <a:pPr marL="474979" lvl="1" indent="-237490" algn="just">
               <a:lnSpc>
                 <a:spcPts val="3981"/>
               </a:lnSpc>
@@ -4087,7 +4086,7 @@
               <a:buChar char="•"/>
             </a:pPr>
             <a:r>
-              <a:rPr lang="en-US" b="true" sz="2199" spc="127">
+              <a:rPr lang="en-US" sz="2199" b="1" spc="127">
                 <a:solidFill>
                   <a:srgbClr val="FFFFFF"/>
                 </a:solidFill>
@@ -4108,23 +4107,11 @@
                 <a:cs typeface="Open Sauce"/>
                 <a:sym typeface="Open Sauce"/>
               </a:rPr>
-              <a:t> Replaces isol</a:t>
-            </a:r>
-            <a:r>
-              <a:rPr lang="en-US" sz="2199" spc="127">
-                <a:solidFill>
-                  <a:srgbClr val="FFFFFF"/>
-                </a:solidFill>
-                <a:latin typeface="Open Sauce"/>
-                <a:ea typeface="Open Sauce"/>
-                <a:cs typeface="Open Sauce"/>
-                <a:sym typeface="Open Sauce"/>
-              </a:rPr>
-              <a:t>ated alerts by combining Business Rules (30%), Machine Learning (30%), and Network Graph Centrality (40%) into a single prioritized score. </a:t>
-            </a:r>
-          </a:p>
-          <a:p>
-            <a:pPr algn="just" marL="474979" indent="-237490" lvl="1">
+              <a:t> Replaces isolated alerts by combining Business Rules (30%), Machine Learning (30%), and Network Graph Centrality (40%) into a single prioritized score. </a:t>
+            </a:r>
+          </a:p>
+          <a:p>
+            <a:pPr marL="474979" lvl="1" indent="-237490" algn="just">
               <a:lnSpc>
                 <a:spcPts val="3981"/>
               </a:lnSpc>
@@ -4132,7 +4119,7 @@
               <a:buChar char="•"/>
             </a:pPr>
             <a:r>
-              <a:rPr lang="en-US" b="true" sz="2199" spc="127">
+              <a:rPr lang="en-US" sz="2199" b="1" spc="127">
                 <a:solidFill>
                   <a:srgbClr val="FFFFFF"/>
                 </a:solidFill>
@@ -4157,7 +4144,7 @@
             </a:r>
           </a:p>
           <a:p>
-            <a:pPr algn="just" marL="474979" indent="-237490" lvl="1">
+            <a:pPr marL="474979" lvl="1" indent="-237490" algn="just">
               <a:lnSpc>
                 <a:spcPts val="3981"/>
               </a:lnSpc>
@@ -4165,7 +4152,7 @@
               <a:buChar char="•"/>
             </a:pPr>
             <a:r>
-              <a:rPr lang="en-US" b="true" sz="2199" spc="127">
+              <a:rPr lang="en-US" sz="2199" b="1" spc="127">
                 <a:solidFill>
                   <a:srgbClr val="FFFFFF"/>
                 </a:solidFill>
@@ -4174,19 +4161,7 @@
                 <a:cs typeface="Open Sauce Bold"/>
                 <a:sym typeface="Open Sauce Bold"/>
               </a:rPr>
-              <a:t>A</a:t>
-            </a:r>
-            <a:r>
-              <a:rPr lang="en-US" b="true" sz="2199" spc="127">
-                <a:solidFill>
-                  <a:srgbClr val="FFFFFF"/>
-                </a:solidFill>
-                <a:latin typeface="Open Sauce Bold"/>
-                <a:ea typeface="Open Sauce Bold"/>
-                <a:cs typeface="Open Sauce Bold"/>
-                <a:sym typeface="Open Sauce Bold"/>
-              </a:rPr>
-              <a:t>I Copilot &amp; Second Brain Workspace:</a:t>
+              <a:t>AI Copilot &amp; Second Brain Workspace:</a:t>
             </a:r>
             <a:r>
               <a:rPr lang="en-US" sz="2199" spc="127">
@@ -4207,17 +4182,26 @@
                 <a:spcPts val="4162"/>
               </a:lnSpc>
             </a:pPr>
+            <a:endParaRPr lang="en-US" sz="2199" spc="127">
+              <a:solidFill>
+                <a:srgbClr val="FFFFFF"/>
+              </a:solidFill>
+              <a:latin typeface="Open Sauce"/>
+              <a:ea typeface="Open Sauce"/>
+              <a:cs typeface="Open Sauce"/>
+              <a:sym typeface="Open Sauce"/>
+            </a:endParaRPr>
           </a:p>
         </p:txBody>
       </p:sp>
       <p:sp>
         <p:nvSpPr>
-          <p:cNvPr name="TextBox 12" id="12"/>
-          <p:cNvSpPr txBox="true"/>
+          <p:cNvPr id="12" name="TextBox 12"/>
+          <p:cNvSpPr txBox="1"/>
           <p:nvPr/>
         </p:nvSpPr>
         <p:spPr>
-          <a:xfrm rot="0">
+          <a:xfrm>
             <a:off x="9823527" y="579202"/>
             <a:ext cx="8115165" cy="829006"/>
           </a:xfrm>
@@ -4226,7 +4210,7 @@
           </a:prstGeom>
         </p:spPr>
         <p:txBody>
-          <a:bodyPr anchor="t" rtlCol="false" tIns="0" lIns="0" bIns="0" rIns="0">
+          <a:bodyPr lIns="0" tIns="0" rIns="0" bIns="0" rtlCol="0" anchor="t">
             <a:spAutoFit/>
           </a:bodyPr>
           <a:lstStyle/>
@@ -4237,7 +4221,7 @@
               </a:lnSpc>
             </a:pPr>
             <a:r>
-              <a:rPr lang="en-US" sz="4568" spc="447" b="true">
+              <a:rPr lang="en-US" sz="4568" b="1" spc="447">
                 <a:solidFill>
                   <a:srgbClr val="FFFFFF"/>
                 </a:solidFill>
@@ -4260,13 +4244,14 @@
 </file>
 
 <file path=ppt/slides/slide3.xml><?xml version="1.0" encoding="utf-8"?>
-<p:sld xmlns:p="http://schemas.openxmlformats.org/presentationml/2006/main" xmlns:a="http://schemas.openxmlformats.org/drawingml/2006/main" xmlns:r="http://schemas.openxmlformats.org/officeDocument/2006/relationships">
+<p:sld xmlns:a="http://schemas.openxmlformats.org/drawingml/2006/main" xmlns:r="http://schemas.openxmlformats.org/officeDocument/2006/relationships" xmlns:p="http://schemas.openxmlformats.org/presentationml/2006/main">
   <p:cSld>
     <p:bg>
       <p:bgPr>
         <a:solidFill>
           <a:srgbClr val="FDFBFB"/>
         </a:solidFill>
+        <a:effectLst/>
       </p:bgPr>
     </p:bg>
     <p:spTree>
@@ -4285,12 +4270,12 @@
       </p:grpSpPr>
       <p:sp>
         <p:nvSpPr>
-          <p:cNvPr name="Freeform 2" id="2"/>
+          <p:cNvPr id="2" name="Freeform 2"/>
           <p:cNvSpPr/>
           <p:nvPr/>
         </p:nvSpPr>
         <p:spPr>
-          <a:xfrm flipH="false" flipV="false" rot="0">
+          <a:xfrm>
             <a:off x="1195664" y="2167623"/>
             <a:ext cx="15896671" cy="7280146"/>
           </a:xfrm>
@@ -4299,9 +4284,9 @@
             <a:gdLst/>
             <a:ahLst/>
             <a:cxnLst/>
-            <a:rect r="r" b="b" t="t" l="l"/>
+            <a:rect l="l" t="t" r="r" b="b"/>
             <a:pathLst>
-              <a:path h="7280146" w="15896671">
+              <a:path w="15896671" h="7280146">
                 <a:moveTo>
                   <a:pt x="0" y="0"/>
                 </a:moveTo>
@@ -4324,19 +4309,19 @@
           <a:blipFill>
             <a:blip r:embed="rId2"/>
             <a:stretch>
-              <a:fillRect l="0" t="-21824" r="0" b="0"/>
+              <a:fillRect t="-21824"/>
             </a:stretch>
           </a:blipFill>
         </p:spPr>
       </p:sp>
       <p:sp>
         <p:nvSpPr>
-          <p:cNvPr name="TextBox 3" id="3"/>
-          <p:cNvSpPr txBox="true"/>
+          <p:cNvPr id="3" name="TextBox 3"/>
+          <p:cNvSpPr txBox="1"/>
           <p:nvPr/>
         </p:nvSpPr>
         <p:spPr>
-          <a:xfrm rot="0">
+          <a:xfrm>
             <a:off x="2068458" y="658816"/>
             <a:ext cx="14688513" cy="988198"/>
           </a:xfrm>
@@ -4345,12 +4330,12 @@
           </a:prstGeom>
         </p:spPr>
         <p:txBody>
-          <a:bodyPr anchor="t" rtlCol="false" tIns="0" lIns="0" bIns="0" rIns="0">
+          <a:bodyPr lIns="0" tIns="0" rIns="0" bIns="0" rtlCol="0" anchor="t">
             <a:spAutoFit/>
           </a:bodyPr>
           <a:lstStyle/>
           <a:p>
-            <a:pPr algn="l" marL="0" indent="0" lvl="0">
+            <a:pPr marL="0" lvl="0" indent="0" algn="l">
               <a:lnSpc>
                 <a:spcPts val="7619"/>
               </a:lnSpc>
@@ -4359,7 +4344,7 @@
               </a:spcBef>
             </a:pPr>
             <a:r>
-              <a:rPr lang="en-US" b="true" sz="5521" spc="27">
+              <a:rPr lang="en-US" sz="5521" b="1" spc="27">
                 <a:solidFill>
                   <a:srgbClr val="1C5739"/>
                 </a:solidFill>
@@ -4382,13 +4367,14 @@
 </file>
 
 <file path=ppt/slides/slide4.xml><?xml version="1.0" encoding="utf-8"?>
-<p:sld xmlns:p="http://schemas.openxmlformats.org/presentationml/2006/main" xmlns:a="http://schemas.openxmlformats.org/drawingml/2006/main" xmlns:r="http://schemas.openxmlformats.org/officeDocument/2006/relationships">
+<p:sld xmlns:a="http://schemas.openxmlformats.org/drawingml/2006/main" xmlns:r="http://schemas.openxmlformats.org/officeDocument/2006/relationships" xmlns:p="http://schemas.openxmlformats.org/presentationml/2006/main">
   <p:cSld>
     <p:bg>
       <p:bgPr>
         <a:solidFill>
           <a:srgbClr val="FDFBFB"/>
         </a:solidFill>
+        <a:effectLst/>
       </p:bgPr>
     </p:bg>
     <p:spTree>
@@ -4407,12 +4393,12 @@
       </p:grpSpPr>
       <p:grpSp>
         <p:nvGrpSpPr>
-          <p:cNvPr name="Group 2" id="2"/>
+          <p:cNvPr id="2" name="Group 2"/>
           <p:cNvGrpSpPr/>
           <p:nvPr/>
         </p:nvGrpSpPr>
         <p:grpSpPr>
-          <a:xfrm rot="0">
+          <a:xfrm>
             <a:off x="16588201" y="-3286592"/>
             <a:ext cx="6306960" cy="6309618"/>
             <a:chOff x="0" y="0"/>
@@ -4421,12 +4407,12 @@
         </p:grpSpPr>
         <p:sp>
           <p:nvSpPr>
-            <p:cNvPr name="Freeform 3" id="3"/>
+            <p:cNvPr id="3" name="Freeform 3"/>
             <p:cNvSpPr/>
             <p:nvPr/>
           </p:nvSpPr>
           <p:spPr>
-            <a:xfrm flipH="false" flipV="false" rot="0">
+            <a:xfrm>
               <a:off x="0" y="508"/>
               <a:ext cx="6832726" cy="6835140"/>
             </a:xfrm>
@@ -4435,9 +4421,9 @@
               <a:gdLst/>
               <a:ahLst/>
               <a:cxnLst/>
-              <a:rect r="r" b="b" t="t" l="l"/>
+              <a:rect l="l" t="t" r="r" b="b"/>
               <a:pathLst>
-                <a:path h="6835140" w="6832726">
+                <a:path w="6832726" h="6835140">
                   <a:moveTo>
                     <a:pt x="3408807" y="6835140"/>
                   </a:moveTo>
@@ -7275,12 +7261,12 @@
       </p:grpSp>
       <p:grpSp>
         <p:nvGrpSpPr>
-          <p:cNvPr name="Group 4" id="4"/>
+          <p:cNvPr id="4" name="Group 4"/>
           <p:cNvGrpSpPr/>
           <p:nvPr/>
         </p:nvGrpSpPr>
         <p:grpSpPr>
-          <a:xfrm rot="0">
+          <a:xfrm>
             <a:off x="17259300" y="-2366249"/>
             <a:ext cx="4512106" cy="4512106"/>
             <a:chOff x="0" y="0"/>
@@ -7289,12 +7275,12 @@
         </p:grpSpPr>
         <p:sp>
           <p:nvSpPr>
-            <p:cNvPr name="Freeform 5" id="5"/>
+            <p:cNvPr id="5" name="Freeform 5"/>
             <p:cNvSpPr/>
             <p:nvPr/>
           </p:nvSpPr>
           <p:spPr>
-            <a:xfrm flipH="false" flipV="false" rot="0">
+            <a:xfrm>
               <a:off x="0" y="0"/>
               <a:ext cx="812800" cy="812800"/>
             </a:xfrm>
@@ -7303,9 +7289,9 @@
               <a:gdLst/>
               <a:ahLst/>
               <a:cxnLst/>
-              <a:rect r="r" b="b" t="t" l="l"/>
+              <a:rect l="l" t="t" r="r" b="b"/>
               <a:pathLst>
-                <a:path h="812800" w="812800">
+                <a:path w="812800" h="812800">
                   <a:moveTo>
                     <a:pt x="406400" y="0"/>
                   </a:moveTo>
@@ -7347,8 +7333,8 @@
         </p:sp>
         <p:sp>
           <p:nvSpPr>
-            <p:cNvPr name="TextBox 6" id="6"/>
-            <p:cNvSpPr txBox="true"/>
+            <p:cNvPr id="6" name="TextBox 6"/>
+            <p:cNvSpPr txBox="1"/>
             <p:nvPr/>
           </p:nvSpPr>
           <p:spPr>
@@ -7361,7 +7347,7 @@
             </a:prstGeom>
           </p:spPr>
           <p:txBody>
-            <a:bodyPr anchor="ctr" rtlCol="false" tIns="50800" lIns="50800" bIns="50800" rIns="50800"/>
+            <a:bodyPr lIns="50800" tIns="50800" rIns="50800" bIns="50800" rtlCol="0" anchor="ctr"/>
             <a:lstStyle/>
             <a:p>
               <a:pPr algn="ctr">
@@ -7369,18 +7355,19 @@
                   <a:spcPts val="2859"/>
                 </a:lnSpc>
               </a:pPr>
+              <a:endParaRPr/>
             </a:p>
           </p:txBody>
         </p:sp>
       </p:grpSp>
       <p:sp>
         <p:nvSpPr>
-          <p:cNvPr name="TextBox 7" id="7"/>
-          <p:cNvSpPr txBox="true"/>
+          <p:cNvPr id="7" name="TextBox 7"/>
+          <p:cNvSpPr txBox="1"/>
           <p:nvPr/>
         </p:nvSpPr>
         <p:spPr>
-          <a:xfrm rot="0">
+          <a:xfrm>
             <a:off x="1869395" y="394542"/>
             <a:ext cx="8510384" cy="1825014"/>
           </a:xfrm>
@@ -7389,12 +7376,12 @@
           </a:prstGeom>
         </p:spPr>
         <p:txBody>
-          <a:bodyPr anchor="t" rtlCol="false" tIns="0" lIns="0" bIns="0" rIns="0">
+          <a:bodyPr lIns="0" tIns="0" rIns="0" bIns="0" rtlCol="0" anchor="t">
             <a:spAutoFit/>
           </a:bodyPr>
           <a:lstStyle/>
           <a:p>
-            <a:pPr algn="l" marL="0" indent="0" lvl="0">
+            <a:pPr marL="0" lvl="0" indent="0" algn="l">
               <a:lnSpc>
                 <a:spcPts val="7128"/>
               </a:lnSpc>
@@ -7403,7 +7390,7 @@
               </a:spcBef>
             </a:pPr>
             <a:r>
-              <a:rPr lang="en-US" b="true" sz="5165" spc="506">
+              <a:rPr lang="en-US" sz="5165" b="1" spc="506">
                 <a:solidFill>
                   <a:srgbClr val="231F20"/>
                 </a:solidFill>
@@ -7419,12 +7406,12 @@
       </p:sp>
       <p:sp>
         <p:nvSpPr>
-          <p:cNvPr name="Freeform 8" id="8"/>
+          <p:cNvPr id="8" name="Freeform 8"/>
           <p:cNvSpPr/>
           <p:nvPr/>
         </p:nvSpPr>
         <p:spPr>
-          <a:xfrm flipH="false" flipV="false" rot="0">
+          <a:xfrm>
             <a:off x="16322124" y="7754894"/>
             <a:ext cx="4118443" cy="3654183"/>
           </a:xfrm>
@@ -7433,9 +7420,9 @@
             <a:gdLst/>
             <a:ahLst/>
             <a:cxnLst/>
-            <a:rect r="r" b="b" t="t" l="l"/>
+            <a:rect l="l" t="t" r="r" b="b"/>
             <a:pathLst>
-              <a:path h="3654183" w="4118443">
+              <a:path w="4118443" h="3654183">
                 <a:moveTo>
                   <a:pt x="0" y="0"/>
                 </a:moveTo>
@@ -7456,27 +7443,27 @@
             </a:pathLst>
           </a:custGeom>
           <a:blipFill>
-            <a:blip r:embed="rId2">
+            <a:blip>
               <a:extLst>
                 <a:ext uri="{96DAC541-7B7A-43D3-8B79-37D633B846F1}">
-                  <asvg:svgBlip xmlns:asvg="http://schemas.microsoft.com/office/drawing/2016/SVG/main" r:embed="rId3"/>
+                  <asvg:svgBlip xmlns:asvg="http://schemas.microsoft.com/office/drawing/2016/SVG/main" r:embed="rId2"/>
                 </a:ext>
               </a:extLst>
             </a:blip>
             <a:stretch>
-              <a:fillRect l="0" t="0" r="0" b="0"/>
+              <a:fillRect/>
             </a:stretch>
           </a:blipFill>
         </p:spPr>
       </p:sp>
       <p:sp>
         <p:nvSpPr>
-          <p:cNvPr name="Freeform 9" id="9"/>
+          <p:cNvPr id="9" name="Freeform 9"/>
           <p:cNvSpPr/>
           <p:nvPr/>
         </p:nvSpPr>
         <p:spPr>
-          <a:xfrm flipH="true" flipV="true" rot="0">
+          <a:xfrm flipH="1" flipV="1">
             <a:off x="-2059222" y="-798391"/>
             <a:ext cx="4118443" cy="3654183"/>
           </a:xfrm>
@@ -7485,9 +7472,9 @@
             <a:gdLst/>
             <a:ahLst/>
             <a:cxnLst/>
-            <a:rect r="r" b="b" t="t" l="l"/>
+            <a:rect l="l" t="t" r="r" b="b"/>
             <a:pathLst>
-              <a:path h="3654183" w="4118443">
+              <a:path w="4118443" h="3654183">
                 <a:moveTo>
                   <a:pt x="4118444" y="3654182"/>
                 </a:moveTo>
@@ -7508,27 +7495,27 @@
             </a:pathLst>
           </a:custGeom>
           <a:blipFill>
-            <a:blip r:embed="rId2">
+            <a:blip>
               <a:extLst>
                 <a:ext uri="{96DAC541-7B7A-43D3-8B79-37D633B846F1}">
-                  <asvg:svgBlip xmlns:asvg="http://schemas.microsoft.com/office/drawing/2016/SVG/main" r:embed="rId3"/>
+                  <asvg:svgBlip xmlns:asvg="http://schemas.microsoft.com/office/drawing/2016/SVG/main" r:embed="rId2"/>
                 </a:ext>
               </a:extLst>
             </a:blip>
             <a:stretch>
-              <a:fillRect l="0" t="0" r="0" b="0"/>
+              <a:fillRect/>
             </a:stretch>
           </a:blipFill>
         </p:spPr>
       </p:sp>
       <p:sp>
         <p:nvSpPr>
-          <p:cNvPr name="TextBox 10" id="10"/>
-          <p:cNvSpPr txBox="true"/>
+          <p:cNvPr id="10" name="TextBox 10"/>
+          <p:cNvSpPr txBox="1"/>
           <p:nvPr/>
         </p:nvSpPr>
         <p:spPr>
-          <a:xfrm rot="0">
+          <a:xfrm>
             <a:off x="422849" y="2444966"/>
             <a:ext cx="8547163" cy="7137019"/>
           </a:xfrm>
@@ -7537,12 +7524,12 @@
           </a:prstGeom>
         </p:spPr>
         <p:txBody>
-          <a:bodyPr anchor="t" rtlCol="false" tIns="0" lIns="0" bIns="0" rIns="0">
+          <a:bodyPr lIns="0" tIns="0" rIns="0" bIns="0" rtlCol="0" anchor="t">
             <a:spAutoFit/>
           </a:bodyPr>
           <a:lstStyle/>
           <a:p>
-            <a:pPr algn="just" marL="496569" indent="-248284" lvl="1">
+            <a:pPr marL="496569" lvl="1" indent="-248284" algn="just">
               <a:lnSpc>
                 <a:spcPts val="4162"/>
               </a:lnSpc>
@@ -7550,7 +7537,7 @@
               <a:buChar char="•"/>
             </a:pPr>
             <a:r>
-              <a:rPr lang="en-US" b="true" sz="2299" spc="133">
+              <a:rPr lang="en-US" sz="2299" b="1" spc="133">
                 <a:solidFill>
                   <a:srgbClr val="231F20"/>
                 </a:solidFill>
@@ -7571,23 +7558,11 @@
                 <a:cs typeface="Open Sauce"/>
                 <a:sym typeface="Open Sauce"/>
               </a:rPr>
-              <a:t>Generated 5,000+ synthetic claims, 200</a:t>
-            </a:r>
-            <a:r>
-              <a:rPr lang="en-US" sz="2299" spc="133">
-                <a:solidFill>
-                  <a:srgbClr val="231F20"/>
-                </a:solidFill>
-                <a:latin typeface="Open Sauce"/>
-                <a:ea typeface="Open Sauce"/>
-                <a:cs typeface="Open Sauce"/>
-                <a:sym typeface="Open Sauce"/>
-              </a:rPr>
-              <a:t> provider NPIs, 1,000 members, and 50 facilities via Faker with zero missing primary keys (test_data_gen.py).</a:t>
-            </a:r>
-          </a:p>
-          <a:p>
-            <a:pPr algn="just" marL="496569" indent="-248284" lvl="1">
+              <a:t>Generated 5,000+ synthetic claims, 200 provider NPIs, 1,000 members, and 50 facilities via Faker with zero missing primary keys (test_data_gen.py).</a:t>
+            </a:r>
+          </a:p>
+          <a:p>
+            <a:pPr marL="496569" lvl="1" indent="-248284" algn="just">
               <a:lnSpc>
                 <a:spcPts val="4162"/>
               </a:lnSpc>
@@ -7595,7 +7570,7 @@
               <a:buChar char="•"/>
             </a:pPr>
             <a:r>
-              <a:rPr lang="en-US" b="true" sz="2299" spc="133">
+              <a:rPr lang="en-US" sz="2299" b="1" spc="133">
                 <a:solidFill>
                   <a:srgbClr val="231F20"/>
                 </a:solidFill>
@@ -7608,11 +7583,11 @@
             </a:r>
           </a:p>
           <a:p>
-            <a:pPr algn="just" marL="474979" indent="-237490" lvl="1">
+            <a:pPr marL="474979" lvl="1" indent="-237490" algn="just">
               <a:lnSpc>
                 <a:spcPts val="3981"/>
               </a:lnSpc>
-              <a:buAutoNum type="arabicPeriod" startAt="1"/>
+              <a:buAutoNum type="arabicPeriod"/>
             </a:pPr>
             <a:r>
               <a:rPr lang="en-US" sz="2199" spc="127">
@@ -7628,11 +7603,11 @@
             </a:r>
           </a:p>
           <a:p>
-            <a:pPr algn="just" marL="474979" indent="-237490" lvl="1">
+            <a:pPr marL="474979" lvl="1" indent="-237490" algn="just">
               <a:lnSpc>
                 <a:spcPts val="3981"/>
               </a:lnSpc>
-              <a:buAutoNum type="arabicPeriod" startAt="1"/>
+              <a:buAutoNum type="arabicPeriod"/>
             </a:pPr>
             <a:r>
               <a:rPr lang="en-US" sz="2199" spc="127">
@@ -7648,11 +7623,11 @@
             </a:r>
           </a:p>
           <a:p>
-            <a:pPr algn="just" marL="474979" indent="-237490" lvl="1">
+            <a:pPr marL="474979" lvl="1" indent="-237490" algn="just">
               <a:lnSpc>
                 <a:spcPts val="3981"/>
               </a:lnSpc>
-              <a:buAutoNum type="arabicPeriod" startAt="1"/>
+              <a:buAutoNum type="arabicPeriod"/>
             </a:pPr>
             <a:r>
               <a:rPr lang="en-US" sz="2199" spc="127">
@@ -7668,7 +7643,7 @@
             </a:r>
           </a:p>
           <a:p>
-            <a:pPr algn="just" marL="474979" indent="-237490" lvl="1">
+            <a:pPr marL="474979" lvl="1" indent="-237490" algn="just">
               <a:lnSpc>
                 <a:spcPts val="3981"/>
               </a:lnSpc>
@@ -7694,41 +7669,50 @@
                 <a:spcPts val="4162"/>
               </a:lnSpc>
             </a:pPr>
+            <a:endParaRPr lang="en-US" sz="2199" spc="127">
+              <a:solidFill>
+                <a:srgbClr val="231F20"/>
+              </a:solidFill>
+              <a:latin typeface="Open Sauce"/>
+              <a:ea typeface="Open Sauce"/>
+              <a:cs typeface="Open Sauce"/>
+              <a:sym typeface="Open Sauce"/>
+            </a:endParaRPr>
           </a:p>
         </p:txBody>
       </p:sp>
       <p:sp>
         <p:nvSpPr>
-          <p:cNvPr name="AutoShape 11" id="11"/>
+          <p:cNvPr id="11" name="AutoShape 11"/>
           <p:cNvSpPr/>
           <p:nvPr/>
         </p:nvSpPr>
         <p:spPr>
-          <a:xfrm flipV="true">
+          <a:xfrm flipV="1">
             <a:off x="9182100" y="2455192"/>
             <a:ext cx="0" cy="6492240"/>
           </a:xfrm>
           <a:prstGeom prst="line">
             <a:avLst/>
           </a:prstGeom>
-          <a:ln cap="flat" w="76200">
+          <a:ln w="76200" cap="flat">
             <a:solidFill>
               <a:srgbClr val="397D5A"/>
             </a:solidFill>
             <a:prstDash val="solid"/>
-            <a:headEnd type="none" len="sm" w="sm"/>
-            <a:tailEnd type="none" len="sm" w="sm"/>
+            <a:headEnd type="none" w="sm" len="sm"/>
+            <a:tailEnd type="none" w="sm" len="sm"/>
           </a:ln>
         </p:spPr>
       </p:sp>
       <p:sp>
         <p:nvSpPr>
-          <p:cNvPr name="TextBox 12" id="12"/>
-          <p:cNvSpPr txBox="true"/>
+          <p:cNvPr id="12" name="TextBox 12"/>
+          <p:cNvSpPr txBox="1"/>
           <p:nvPr/>
         </p:nvSpPr>
         <p:spPr>
-          <a:xfrm rot="0">
+          <a:xfrm>
             <a:off x="9777616" y="394542"/>
             <a:ext cx="8510384" cy="1825014"/>
           </a:xfrm>
@@ -7737,12 +7721,12 @@
           </a:prstGeom>
         </p:spPr>
         <p:txBody>
-          <a:bodyPr anchor="t" rtlCol="false" tIns="0" lIns="0" bIns="0" rIns="0">
+          <a:bodyPr lIns="0" tIns="0" rIns="0" bIns="0" rtlCol="0" anchor="t">
             <a:spAutoFit/>
           </a:bodyPr>
           <a:lstStyle/>
           <a:p>
-            <a:pPr algn="l" marL="0" indent="0" lvl="0">
+            <a:pPr marL="0" lvl="0" indent="0" algn="l">
               <a:lnSpc>
                 <a:spcPts val="7128"/>
               </a:lnSpc>
@@ -7751,7 +7735,7 @@
               </a:spcBef>
             </a:pPr>
             <a:r>
-              <a:rPr lang="en-US" b="true" sz="5165" spc="506">
+              <a:rPr lang="en-US" sz="5165" b="1" spc="506">
                 <a:solidFill>
                   <a:srgbClr val="231F20"/>
                 </a:solidFill>
@@ -7767,12 +7751,12 @@
       </p:sp>
       <p:sp>
         <p:nvSpPr>
-          <p:cNvPr name="TextBox 13" id="13"/>
-          <p:cNvSpPr txBox="true"/>
+          <p:cNvPr id="13" name="TextBox 13"/>
+          <p:cNvSpPr txBox="1"/>
           <p:nvPr/>
         </p:nvSpPr>
         <p:spPr>
-          <a:xfrm rot="0">
+          <a:xfrm>
             <a:off x="9528066" y="3130991"/>
             <a:ext cx="7506186" cy="5016818"/>
           </a:xfrm>
@@ -7781,12 +7765,12 @@
           </a:prstGeom>
         </p:spPr>
         <p:txBody>
-          <a:bodyPr anchor="t" rtlCol="false" tIns="0" lIns="0" bIns="0" rIns="0">
+          <a:bodyPr lIns="0" tIns="0" rIns="0" bIns="0" rtlCol="0" anchor="t">
             <a:spAutoFit/>
           </a:bodyPr>
           <a:lstStyle/>
           <a:p>
-            <a:pPr algn="just" marL="474979" indent="-237490" lvl="1">
+            <a:pPr marL="474979" lvl="1" indent="-237490" algn="just">
               <a:lnSpc>
                 <a:spcPts val="3981"/>
               </a:lnSpc>
@@ -7794,7 +7778,7 @@
               <a:buChar char="•"/>
             </a:pPr>
             <a:r>
-              <a:rPr lang="en-US" b="true" sz="2199" spc="127">
+              <a:rPr lang="en-US" sz="2199" b="1" spc="127">
                 <a:solidFill>
                   <a:srgbClr val="231F20"/>
                 </a:solidFill>
@@ -7815,23 +7799,11 @@
                 <a:cs typeface="Open Sauce"/>
                 <a:sym typeface="Open Sauce"/>
               </a:rPr>
-              <a:t> =</a:t>
-            </a:r>
-            <a:r>
-              <a:rPr lang="en-US" sz="2199" spc="127">
-                <a:solidFill>
-                  <a:srgbClr val="231F20"/>
-                </a:solidFill>
-                <a:latin typeface="Open Sauce"/>
-                <a:ea typeface="Open Sauce"/>
-                <a:cs typeface="Open Sauce"/>
-                <a:sym typeface="Open Sauce"/>
-              </a:rPr>
-              <a:t> Providers, Members, Clinics; Edges = Claims, Referrals, Shared Tax IDs.</a:t>
-            </a:r>
-          </a:p>
-          <a:p>
-            <a:pPr algn="just" marL="474979" indent="-237490" lvl="1">
+              <a:t> = Providers, Members, Clinics; Edges = Claims, Referrals, Shared Tax IDs.</a:t>
+            </a:r>
+          </a:p>
+          <a:p>
+            <a:pPr marL="474979" lvl="1" indent="-237490" algn="just">
               <a:lnSpc>
                 <a:spcPts val="3981"/>
               </a:lnSpc>
@@ -7839,7 +7811,7 @@
               <a:buChar char="•"/>
             </a:pPr>
             <a:r>
-              <a:rPr lang="en-US" b="true" sz="2199" spc="127">
+              <a:rPr lang="en-US" sz="2199" b="1" spc="127">
                 <a:solidFill>
                   <a:srgbClr val="231F20"/>
                 </a:solidFill>
@@ -7848,19 +7820,7 @@
                 <a:cs typeface="Open Sauce Bold"/>
                 <a:sym typeface="Open Sauce Bold"/>
               </a:rPr>
-              <a:t>Co</a:t>
-            </a:r>
-            <a:r>
-              <a:rPr lang="en-US" b="true" sz="2199" spc="127">
-                <a:solidFill>
-                  <a:srgbClr val="231F20"/>
-                </a:solidFill>
-                <a:latin typeface="Open Sauce Bold"/>
-                <a:ea typeface="Open Sauce Bold"/>
-                <a:cs typeface="Open Sauce Bold"/>
-                <a:sym typeface="Open Sauce Bold"/>
-              </a:rPr>
-              <a:t>ordinated Fraud Ring Analytics:</a:t>
+              <a:t>Coordinated Fraud Ring Analytics:</a:t>
             </a:r>
             <a:r>
               <a:rPr lang="en-US" sz="2199" spc="127">
@@ -7876,7 +7836,7 @@
             </a:r>
           </a:p>
           <a:p>
-            <a:pPr algn="just" marL="474979" indent="-237490" lvl="1">
+            <a:pPr marL="474979" lvl="1" indent="-237490" algn="just">
               <a:lnSpc>
                 <a:spcPts val="3981"/>
               </a:lnSpc>
@@ -7884,7 +7844,7 @@
               <a:buChar char="•"/>
             </a:pPr>
             <a:r>
-              <a:rPr lang="en-US" b="true" sz="2199" spc="127">
+              <a:rPr lang="en-US" sz="2199" b="1" spc="127">
                 <a:solidFill>
                   <a:srgbClr val="231F20"/>
                 </a:solidFill>
@@ -7914,6 +7874,15 @@
                 <a:spcPts val="4162"/>
               </a:lnSpc>
             </a:pPr>
+            <a:endParaRPr lang="en-US" sz="2199" spc="127">
+              <a:solidFill>
+                <a:srgbClr val="231F20"/>
+              </a:solidFill>
+              <a:latin typeface="Open Sauce"/>
+              <a:ea typeface="Open Sauce"/>
+              <a:cs typeface="Open Sauce"/>
+              <a:sym typeface="Open Sauce"/>
+            </a:endParaRPr>
           </a:p>
         </p:txBody>
       </p:sp>
@@ -7926,13 +7895,14 @@
 </file>
 
 <file path=ppt/slides/slide5.xml><?xml version="1.0" encoding="utf-8"?>
-<p:sld xmlns:p="http://schemas.openxmlformats.org/presentationml/2006/main" xmlns:a="http://schemas.openxmlformats.org/drawingml/2006/main" xmlns:r="http://schemas.openxmlformats.org/officeDocument/2006/relationships">
+<p:sld xmlns:a="http://schemas.openxmlformats.org/drawingml/2006/main" xmlns:r="http://schemas.openxmlformats.org/officeDocument/2006/relationships" xmlns:p="http://schemas.openxmlformats.org/presentationml/2006/main">
   <p:cSld>
     <p:bg>
       <p:bgPr>
         <a:solidFill>
           <a:srgbClr val="FDFBFB"/>
         </a:solidFill>
+        <a:effectLst/>
       </p:bgPr>
     </p:bg>
     <p:spTree>
@@ -7951,12 +7921,12 @@
       </p:grpSpPr>
       <p:sp>
         <p:nvSpPr>
-          <p:cNvPr name="Freeform 2" id="2"/>
+          <p:cNvPr id="2" name="Freeform 2"/>
           <p:cNvSpPr/>
           <p:nvPr/>
         </p:nvSpPr>
         <p:spPr>
-          <a:xfrm flipH="false" flipV="false" rot="0">
+          <a:xfrm>
             <a:off x="15698915" y="8697813"/>
             <a:ext cx="3806571" cy="2083232"/>
           </a:xfrm>
@@ -7965,9 +7935,9 @@
             <a:gdLst/>
             <a:ahLst/>
             <a:cxnLst/>
-            <a:rect r="r" b="b" t="t" l="l"/>
+            <a:rect l="l" t="t" r="r" b="b"/>
             <a:pathLst>
-              <a:path h="2083232" w="3806571">
+              <a:path w="3806571" h="2083232">
                 <a:moveTo>
                   <a:pt x="0" y="0"/>
                 </a:moveTo>
@@ -7988,27 +7958,27 @@
             </a:pathLst>
           </a:custGeom>
           <a:blipFill>
-            <a:blip r:embed="rId2">
+            <a:blip>
               <a:extLst>
                 <a:ext uri="{96DAC541-7B7A-43D3-8B79-37D633B846F1}">
-                  <asvg:svgBlip xmlns:asvg="http://schemas.microsoft.com/office/drawing/2016/SVG/main" r:embed="rId3"/>
+                  <asvg:svgBlip xmlns:asvg="http://schemas.microsoft.com/office/drawing/2016/SVG/main" r:embed="rId2"/>
                 </a:ext>
               </a:extLst>
             </a:blip>
             <a:stretch>
-              <a:fillRect l="0" t="0" r="0" b="0"/>
+              <a:fillRect/>
             </a:stretch>
           </a:blipFill>
         </p:spPr>
       </p:sp>
       <p:sp>
         <p:nvSpPr>
-          <p:cNvPr name="TextBox 3" id="3"/>
-          <p:cNvSpPr txBox="true"/>
+          <p:cNvPr id="3" name="TextBox 3"/>
+          <p:cNvSpPr txBox="1"/>
           <p:nvPr/>
         </p:nvSpPr>
         <p:spPr>
-          <a:xfrm rot="0">
+          <a:xfrm>
             <a:off x="9823527" y="1550157"/>
             <a:ext cx="7778673" cy="4511993"/>
           </a:xfrm>
@@ -8017,12 +7987,12 @@
           </a:prstGeom>
         </p:spPr>
         <p:txBody>
-          <a:bodyPr anchor="t" rtlCol="false" tIns="0" lIns="0" bIns="0" rIns="0">
+          <a:bodyPr lIns="0" tIns="0" rIns="0" bIns="0" rtlCol="0" anchor="t">
             <a:spAutoFit/>
           </a:bodyPr>
           <a:lstStyle/>
           <a:p>
-            <a:pPr algn="just" marL="474979" indent="-237490" lvl="1">
+            <a:pPr marL="474979" lvl="1" indent="-237490" algn="just">
               <a:lnSpc>
                 <a:spcPts val="3981"/>
               </a:lnSpc>
@@ -8030,7 +8000,7 @@
               <a:buChar char="•"/>
             </a:pPr>
             <a:r>
-              <a:rPr lang="en-US" b="true" sz="2199" spc="127">
+              <a:rPr lang="en-US" sz="2199" b="1" spc="127">
                 <a:solidFill>
                   <a:srgbClr val="000000"/>
                 </a:solidFill>
@@ -8039,19 +8009,7 @@
                 <a:cs typeface="Open Sauce Bold"/>
                 <a:sym typeface="Open Sauce Bold"/>
               </a:rPr>
-              <a:t>Rules Engin</a:t>
-            </a:r>
-            <a:r>
-              <a:rPr lang="en-US" b="true" sz="2199" spc="127">
-                <a:solidFill>
-                  <a:srgbClr val="000000"/>
-                </a:solidFill>
-                <a:latin typeface="Open Sauce Bold"/>
-                <a:ea typeface="Open Sauce Bold"/>
-                <a:cs typeface="Open Sauce Bold"/>
-                <a:sym typeface="Open Sauce Bold"/>
-              </a:rPr>
-              <a:t>e (rules_engine.py): </a:t>
+              <a:t>Rules Engine (rules_engine.py): </a:t>
             </a:r>
             <a:r>
               <a:rPr lang="en-US" sz="2199" spc="127">
@@ -8067,7 +8025,7 @@
             </a:r>
           </a:p>
           <a:p>
-            <a:pPr algn="just" marL="474979" indent="-237490" lvl="1">
+            <a:pPr marL="474979" lvl="1" indent="-237490" algn="just">
               <a:lnSpc>
                 <a:spcPts val="3981"/>
               </a:lnSpc>
@@ -8075,7 +8033,7 @@
               <a:buChar char="•"/>
             </a:pPr>
             <a:r>
-              <a:rPr lang="en-US" b="true" sz="2199" spc="127">
+              <a:rPr lang="en-US" sz="2199" b="1" spc="127">
                 <a:solidFill>
                   <a:srgbClr val="000000"/>
                 </a:solidFill>
@@ -8105,12 +8063,21 @@
                 <a:spcPts val="4162"/>
               </a:lnSpc>
             </a:pPr>
+            <a:endParaRPr lang="en-US" sz="2199" spc="127">
+              <a:solidFill>
+                <a:srgbClr val="000000"/>
+              </a:solidFill>
+              <a:latin typeface="Open Sauce"/>
+              <a:ea typeface="Open Sauce"/>
+              <a:cs typeface="Open Sauce"/>
+              <a:sym typeface="Open Sauce"/>
+            </a:endParaRPr>
           </a:p>
         </p:txBody>
       </p:sp>
       <p:grpSp>
         <p:nvGrpSpPr>
-          <p:cNvPr name="Group 4" id="4"/>
+          <p:cNvPr id="4" name="Group 4"/>
           <p:cNvGrpSpPr/>
           <p:nvPr/>
         </p:nvGrpSpPr>
@@ -8124,12 +8091,12 @@
         </p:grpSpPr>
         <p:sp>
           <p:nvSpPr>
-            <p:cNvPr name="Freeform 5" id="5"/>
+            <p:cNvPr id="5" name="Freeform 5"/>
             <p:cNvSpPr/>
             <p:nvPr/>
           </p:nvSpPr>
           <p:spPr>
-            <a:xfrm flipH="false" flipV="false" rot="0">
+            <a:xfrm>
               <a:off x="0" y="0"/>
               <a:ext cx="1147555" cy="4510689"/>
             </a:xfrm>
@@ -8138,9 +8105,9 @@
               <a:gdLst/>
               <a:ahLst/>
               <a:cxnLst/>
-              <a:rect r="r" b="b" t="t" l="l"/>
+              <a:rect l="l" t="t" r="r" b="b"/>
               <a:pathLst>
-                <a:path h="4510689" w="1147555">
+                <a:path w="1147555" h="4510689">
                   <a:moveTo>
                     <a:pt x="0" y="0"/>
                   </a:moveTo>
@@ -8164,8 +8131,8 @@
         </p:sp>
         <p:sp>
           <p:nvSpPr>
-            <p:cNvPr name="TextBox 6" id="6"/>
-            <p:cNvSpPr txBox="true"/>
+            <p:cNvPr id="6" name="TextBox 6"/>
+            <p:cNvSpPr txBox="1"/>
             <p:nvPr/>
           </p:nvSpPr>
           <p:spPr>
@@ -8178,7 +8145,7 @@
             </a:prstGeom>
           </p:spPr>
           <p:txBody>
-            <a:bodyPr anchor="ctr" rtlCol="false" tIns="50800" lIns="50800" bIns="50800" rIns="50800"/>
+            <a:bodyPr lIns="50800" tIns="50800" rIns="50800" bIns="50800" rtlCol="0" anchor="ctr"/>
             <a:lstStyle/>
             <a:p>
               <a:pPr algn="ctr">
@@ -8186,18 +8153,19 @@
                   <a:spcPts val="2859"/>
                 </a:lnSpc>
               </a:pPr>
+              <a:endParaRPr/>
             </a:p>
           </p:txBody>
         </p:sp>
       </p:grpSp>
       <p:sp>
         <p:nvSpPr>
-          <p:cNvPr name="Freeform 7" id="7"/>
+          <p:cNvPr id="7" name="Freeform 7"/>
           <p:cNvSpPr/>
           <p:nvPr/>
         </p:nvSpPr>
         <p:spPr>
-          <a:xfrm flipH="false" flipV="false" rot="0">
+          <a:xfrm>
             <a:off x="9366029" y="1415447"/>
             <a:ext cx="102870" cy="4114800"/>
           </a:xfrm>
@@ -8206,9 +8174,9 @@
             <a:gdLst/>
             <a:ahLst/>
             <a:cxnLst/>
-            <a:rect r="r" b="b" t="t" l="l"/>
+            <a:rect l="l" t="t" r="r" b="b"/>
             <a:pathLst>
-              <a:path h="4114800" w="102870">
+              <a:path w="102870" h="4114800">
                 <a:moveTo>
                   <a:pt x="0" y="0"/>
                 </a:moveTo>
@@ -8229,27 +8197,27 @@
             </a:pathLst>
           </a:custGeom>
           <a:blipFill>
-            <a:blip r:embed="rId4">
+            <a:blip>
               <a:extLst>
                 <a:ext uri="{96DAC541-7B7A-43D3-8B79-37D633B846F1}">
-                  <asvg:svgBlip xmlns:asvg="http://schemas.microsoft.com/office/drawing/2016/SVG/main" r:embed="rId5"/>
+                  <asvg:svgBlip xmlns:asvg="http://schemas.microsoft.com/office/drawing/2016/SVG/main" r:embed="rId3"/>
                 </a:ext>
               </a:extLst>
             </a:blip>
             <a:stretch>
-              <a:fillRect l="0" t="0" r="0" b="0"/>
+              <a:fillRect/>
             </a:stretch>
           </a:blipFill>
         </p:spPr>
       </p:sp>
       <p:sp>
         <p:nvSpPr>
-          <p:cNvPr name="TextBox 8" id="8"/>
-          <p:cNvSpPr txBox="true"/>
+          <p:cNvPr id="8" name="TextBox 8"/>
+          <p:cNvSpPr txBox="1"/>
           <p:nvPr/>
         </p:nvSpPr>
         <p:spPr>
-          <a:xfrm rot="0">
+          <a:xfrm>
             <a:off x="999107" y="588727"/>
             <a:ext cx="8115165" cy="826720"/>
           </a:xfrm>
@@ -8258,7 +8226,7 @@
           </a:prstGeom>
         </p:spPr>
         <p:txBody>
-          <a:bodyPr anchor="t" rtlCol="false" tIns="0" lIns="0" bIns="0" rIns="0">
+          <a:bodyPr lIns="0" tIns="0" rIns="0" bIns="0" rtlCol="0" anchor="t">
             <a:spAutoFit/>
           </a:bodyPr>
           <a:lstStyle/>
@@ -8269,7 +8237,7 @@
               </a:lnSpc>
             </a:pPr>
             <a:r>
-              <a:rPr lang="en-US" sz="4668" spc="457" b="true">
+              <a:rPr lang="en-US" sz="4668" b="1" spc="457">
                 <a:solidFill>
                   <a:srgbClr val="231F20"/>
                 </a:solidFill>
@@ -8285,12 +8253,12 @@
       </p:sp>
       <p:sp>
         <p:nvSpPr>
-          <p:cNvPr name="TextBox 9" id="9"/>
-          <p:cNvSpPr txBox="true"/>
+          <p:cNvPr id="9" name="TextBox 9"/>
+          <p:cNvSpPr txBox="1"/>
           <p:nvPr/>
         </p:nvSpPr>
         <p:spPr>
-          <a:xfrm rot="0">
+          <a:xfrm>
             <a:off x="898304" y="2043822"/>
             <a:ext cx="8115300" cy="2997518"/>
           </a:xfrm>
@@ -8299,12 +8267,12 @@
           </a:prstGeom>
         </p:spPr>
         <p:txBody>
-          <a:bodyPr anchor="t" rtlCol="false" tIns="0" lIns="0" bIns="0" rIns="0">
+          <a:bodyPr lIns="0" tIns="0" rIns="0" bIns="0" rtlCol="0" anchor="t">
             <a:spAutoFit/>
           </a:bodyPr>
           <a:lstStyle/>
           <a:p>
-            <a:pPr algn="just" marL="474979" indent="-237490" lvl="1">
+            <a:pPr marL="474979" lvl="1" indent="-237490" algn="just">
               <a:lnSpc>
                 <a:spcPts val="3981"/>
               </a:lnSpc>
@@ -8321,8 +8289,17 @@
                 <a:cs typeface="Open Sauce"/>
                 <a:sym typeface="Open Sauce"/>
               </a:rPr>
-              <a:t>Configured a modular z</a:t>
-            </a:r>
+              <a:t>Configured a modular zero-cost Python backend architecture with rigid Pydantic schemas (Claim, Provider, SIUCase, GraphPayload). </a:t>
+            </a:r>
+          </a:p>
+          <a:p>
+            <a:pPr marL="474979" lvl="1" indent="-237490" algn="just">
+              <a:lnSpc>
+                <a:spcPts val="3981"/>
+              </a:lnSpc>
+              <a:buFont typeface="Arial"/>
+              <a:buChar char="•"/>
+            </a:pPr>
             <a:r>
               <a:rPr lang="en-US" sz="2199" spc="127">
                 <a:solidFill>
@@ -8333,40 +8310,7 @@
                 <a:cs typeface="Open Sauce"/>
                 <a:sym typeface="Open Sauce"/>
               </a:rPr>
-              <a:t>ero-cost Python backend architecture with rigid Pydantic schemas (Claim, Provider, SIUCase, GraphPayload). </a:t>
-            </a:r>
-          </a:p>
-          <a:p>
-            <a:pPr algn="just" marL="474979" indent="-237490" lvl="1">
-              <a:lnSpc>
-                <a:spcPts val="3981"/>
-              </a:lnSpc>
-              <a:buFont typeface="Arial"/>
-              <a:buChar char="•"/>
-            </a:pPr>
-            <a:r>
-              <a:rPr lang="en-US" sz="2199" spc="127">
-                <a:solidFill>
-                  <a:srgbClr val="231F20"/>
-                </a:solidFill>
-                <a:latin typeface="Open Sauce"/>
-                <a:ea typeface="Open Sauce"/>
-                <a:cs typeface="Open Sauce"/>
-                <a:sym typeface="Open Sauce"/>
-              </a:rPr>
-              <a:t>V</a:t>
-            </a:r>
-            <a:r>
-              <a:rPr lang="en-US" sz="2199" spc="127">
-                <a:solidFill>
-                  <a:srgbClr val="231F20"/>
-                </a:solidFill>
-                <a:latin typeface="Open Sauce"/>
-                <a:ea typeface="Open Sauce"/>
-                <a:cs typeface="Open Sauce"/>
-                <a:sym typeface="Open Sauce"/>
-              </a:rPr>
-              <a:t>erified API endpoints respond with HTTP 200 in sub-20 ms base execution time. </a:t>
+              <a:t>Verified API endpoints respond with HTTP 200 in sub-20 ms base execution time. </a:t>
             </a:r>
           </a:p>
           <a:p>
@@ -8375,17 +8319,26 @@
                 <a:spcPts val="4162"/>
               </a:lnSpc>
             </a:pPr>
+            <a:endParaRPr lang="en-US" sz="2199" spc="127">
+              <a:solidFill>
+                <a:srgbClr val="231F20"/>
+              </a:solidFill>
+              <a:latin typeface="Open Sauce"/>
+              <a:ea typeface="Open Sauce"/>
+              <a:cs typeface="Open Sauce"/>
+              <a:sym typeface="Open Sauce"/>
+            </a:endParaRPr>
           </a:p>
         </p:txBody>
       </p:sp>
       <p:sp>
         <p:nvSpPr>
-          <p:cNvPr name="TextBox 10" id="10"/>
-          <p:cNvSpPr txBox="true"/>
+          <p:cNvPr id="10" name="TextBox 10"/>
+          <p:cNvSpPr txBox="1"/>
           <p:nvPr/>
         </p:nvSpPr>
         <p:spPr>
-          <a:xfrm rot="0">
+          <a:xfrm>
             <a:off x="9823527" y="553427"/>
             <a:ext cx="8115165" cy="826720"/>
           </a:xfrm>
@@ -8394,7 +8347,7 @@
           </a:prstGeom>
         </p:spPr>
         <p:txBody>
-          <a:bodyPr anchor="t" rtlCol="false" tIns="0" lIns="0" bIns="0" rIns="0">
+          <a:bodyPr lIns="0" tIns="0" rIns="0" bIns="0" rtlCol="0" anchor="t">
             <a:spAutoFit/>
           </a:bodyPr>
           <a:lstStyle/>
@@ -8405,7 +8358,7 @@
               </a:lnSpc>
             </a:pPr>
             <a:r>
-              <a:rPr lang="en-US" b="true" sz="4668" spc="457">
+              <a:rPr lang="en-US" sz="4668" b="1" spc="457">
                 <a:solidFill>
                   <a:srgbClr val="000000"/>
                 </a:solidFill>
@@ -8421,12 +8374,12 @@
       </p:sp>
       <p:sp>
         <p:nvSpPr>
-          <p:cNvPr name="TextBox 11" id="11"/>
-          <p:cNvSpPr txBox="true"/>
+          <p:cNvPr id="11" name="TextBox 11"/>
+          <p:cNvSpPr txBox="1"/>
           <p:nvPr/>
         </p:nvSpPr>
         <p:spPr>
-          <a:xfrm rot="0">
+          <a:xfrm>
             <a:off x="2062953" y="5928800"/>
             <a:ext cx="13635962" cy="829006"/>
           </a:xfrm>
@@ -8435,7 +8388,7 @@
           </a:prstGeom>
         </p:spPr>
         <p:txBody>
-          <a:bodyPr anchor="t" rtlCol="false" tIns="0" lIns="0" bIns="0" rIns="0">
+          <a:bodyPr lIns="0" tIns="0" rIns="0" bIns="0" rtlCol="0" anchor="t">
             <a:spAutoFit/>
           </a:bodyPr>
           <a:lstStyle/>
@@ -8446,7 +8399,7 @@
               </a:lnSpc>
             </a:pPr>
             <a:r>
-              <a:rPr lang="en-US" b="true" sz="4568" spc="447">
+              <a:rPr lang="en-US" sz="4568" b="1" spc="447">
                 <a:solidFill>
                   <a:srgbClr val="FFFFFF"/>
                 </a:solidFill>
@@ -8462,12 +8415,12 @@
       </p:sp>
       <p:sp>
         <p:nvSpPr>
-          <p:cNvPr name="TextBox 12" id="12"/>
-          <p:cNvSpPr txBox="true"/>
+          <p:cNvPr id="12" name="TextBox 12"/>
+          <p:cNvSpPr txBox="1"/>
           <p:nvPr/>
         </p:nvSpPr>
         <p:spPr>
-          <a:xfrm rot="0">
+          <a:xfrm>
             <a:off x="999107" y="6938066"/>
             <a:ext cx="16939585" cy="2492693"/>
           </a:xfrm>
@@ -8476,12 +8429,12 @@
           </a:prstGeom>
         </p:spPr>
         <p:txBody>
-          <a:bodyPr anchor="t" rtlCol="false" tIns="0" lIns="0" bIns="0" rIns="0">
+          <a:bodyPr lIns="0" tIns="0" rIns="0" bIns="0" rtlCol="0" anchor="t">
             <a:spAutoFit/>
           </a:bodyPr>
           <a:lstStyle/>
           <a:p>
-            <a:pPr algn="l" marL="474979" indent="-237490" lvl="1">
+            <a:pPr marL="474979" lvl="1" indent="-237490" algn="l">
               <a:lnSpc>
                 <a:spcPts val="3981"/>
               </a:lnSpc>
@@ -8502,7 +8455,7 @@
             </a:r>
           </a:p>
           <a:p>
-            <a:pPr algn="l" marL="474979" indent="-237490" lvl="1">
+            <a:pPr marL="474979" lvl="1" indent="-237490" algn="l">
               <a:lnSpc>
                 <a:spcPts val="3981"/>
               </a:lnSpc>
@@ -8523,7 +8476,7 @@
             </a:r>
           </a:p>
           <a:p>
-            <a:pPr algn="l" marL="474979" indent="-237490" lvl="1">
+            <a:pPr marL="474979" lvl="1" indent="-237490" algn="l">
               <a:lnSpc>
                 <a:spcPts val="3981"/>
               </a:lnSpc>
@@ -8544,7 +8497,7 @@
             </a:r>
           </a:p>
           <a:p>
-            <a:pPr algn="l" marL="474979" indent="-237490" lvl="1">
+            <a:pPr marL="474979" lvl="1" indent="-237490" algn="l">
               <a:lnSpc>
                 <a:spcPts val="3981"/>
               </a:lnSpc>
@@ -8570,6 +8523,15 @@
                 <a:spcPts val="4162"/>
               </a:lnSpc>
             </a:pPr>
+            <a:endParaRPr lang="en-US" sz="2199" spc="127">
+              <a:solidFill>
+                <a:srgbClr val="FFFFFF"/>
+              </a:solidFill>
+              <a:latin typeface="Open Sauce"/>
+              <a:ea typeface="Open Sauce"/>
+              <a:cs typeface="Open Sauce"/>
+              <a:sym typeface="Open Sauce"/>
+            </a:endParaRPr>
           </a:p>
         </p:txBody>
       </p:sp>
@@ -8582,13 +8544,14 @@
 </file>
 
 <file path=ppt/slides/slide6.xml><?xml version="1.0" encoding="utf-8"?>
-<p:sld xmlns:p="http://schemas.openxmlformats.org/presentationml/2006/main" xmlns:a="http://schemas.openxmlformats.org/drawingml/2006/main" xmlns:r="http://schemas.openxmlformats.org/officeDocument/2006/relationships">
+<p:sld xmlns:a="http://schemas.openxmlformats.org/drawingml/2006/main" xmlns:r="http://schemas.openxmlformats.org/officeDocument/2006/relationships" xmlns:p="http://schemas.openxmlformats.org/presentationml/2006/main">
   <p:cSld>
     <p:bg>
       <p:bgPr>
         <a:solidFill>
           <a:srgbClr val="FDFBFB"/>
         </a:solidFill>
+        <a:effectLst/>
       </p:bgPr>
     </p:bg>
     <p:spTree>
@@ -8607,12 +8570,12 @@
       </p:grpSpPr>
       <p:grpSp>
         <p:nvGrpSpPr>
-          <p:cNvPr name="Group 2" id="2"/>
+          <p:cNvPr id="2" name="Group 2"/>
           <p:cNvGrpSpPr/>
           <p:nvPr/>
         </p:nvGrpSpPr>
         <p:grpSpPr>
-          <a:xfrm rot="0">
+          <a:xfrm>
             <a:off x="16384715" y="-558218"/>
             <a:ext cx="3086100" cy="11299900"/>
             <a:chOff x="0" y="0"/>
@@ -8621,12 +8584,12 @@
         </p:grpSpPr>
         <p:sp>
           <p:nvSpPr>
-            <p:cNvPr name="Freeform 3" id="3"/>
+            <p:cNvPr id="3" name="Freeform 3"/>
             <p:cNvSpPr/>
             <p:nvPr/>
           </p:nvSpPr>
           <p:spPr>
-            <a:xfrm flipH="false" flipV="false" rot="0">
+            <a:xfrm>
               <a:off x="0" y="0"/>
               <a:ext cx="812800" cy="2976105"/>
             </a:xfrm>
@@ -8635,9 +8598,9 @@
               <a:gdLst/>
               <a:ahLst/>
               <a:cxnLst/>
-              <a:rect r="r" b="b" t="t" l="l"/>
+              <a:rect l="l" t="t" r="r" b="b"/>
               <a:pathLst>
-                <a:path h="2976105" w="812800">
+                <a:path w="812800" h="2976105">
                   <a:moveTo>
                     <a:pt x="0" y="0"/>
                   </a:moveTo>
@@ -8661,8 +8624,8 @@
         </p:sp>
         <p:sp>
           <p:nvSpPr>
-            <p:cNvPr name="TextBox 4" id="4"/>
-            <p:cNvSpPr txBox="true"/>
+            <p:cNvPr id="4" name="TextBox 4"/>
+            <p:cNvSpPr txBox="1"/>
             <p:nvPr/>
           </p:nvSpPr>
           <p:spPr>
@@ -8675,7 +8638,7 @@
             </a:prstGeom>
           </p:spPr>
           <p:txBody>
-            <a:bodyPr anchor="ctr" rtlCol="false" tIns="50800" lIns="50800" bIns="50800" rIns="50800"/>
+            <a:bodyPr lIns="50800" tIns="50800" rIns="50800" bIns="50800" rtlCol="0" anchor="ctr"/>
             <a:lstStyle/>
             <a:p>
               <a:pPr algn="ctr">
@@ -8683,18 +8646,19 @@
                   <a:spcPts val="2859"/>
                 </a:lnSpc>
               </a:pPr>
+              <a:endParaRPr/>
             </a:p>
           </p:txBody>
         </p:sp>
       </p:grpSp>
       <p:sp>
         <p:nvSpPr>
-          <p:cNvPr name="Freeform 5" id="5"/>
+          <p:cNvPr id="5" name="Freeform 5"/>
           <p:cNvSpPr/>
           <p:nvPr/>
         </p:nvSpPr>
         <p:spPr>
-          <a:xfrm flipH="false" flipV="false" rot="0">
+          <a:xfrm>
             <a:off x="16384715" y="9009597"/>
             <a:ext cx="3806571" cy="2083232"/>
           </a:xfrm>
@@ -8703,9 +8667,9 @@
             <a:gdLst/>
             <a:ahLst/>
             <a:cxnLst/>
-            <a:rect r="r" b="b" t="t" l="l"/>
+            <a:rect l="l" t="t" r="r" b="b"/>
             <a:pathLst>
-              <a:path h="2083232" w="3806571">
+              <a:path w="3806571" h="2083232">
                 <a:moveTo>
                   <a:pt x="0" y="0"/>
                 </a:moveTo>
@@ -8726,27 +8690,27 @@
             </a:pathLst>
           </a:custGeom>
           <a:blipFill>
-            <a:blip r:embed="rId2">
+            <a:blip>
               <a:extLst>
                 <a:ext uri="{96DAC541-7B7A-43D3-8B79-37D633B846F1}">
-                  <asvg:svgBlip xmlns:asvg="http://schemas.microsoft.com/office/drawing/2016/SVG/main" r:embed="rId3"/>
+                  <asvg:svgBlip xmlns:asvg="http://schemas.microsoft.com/office/drawing/2016/SVG/main" r:embed="rId2"/>
                 </a:ext>
               </a:extLst>
             </a:blip>
             <a:stretch>
-              <a:fillRect l="0" t="0" r="0" b="0"/>
+              <a:fillRect/>
             </a:stretch>
           </a:blipFill>
         </p:spPr>
       </p:sp>
       <p:grpSp>
         <p:nvGrpSpPr>
-          <p:cNvPr name="Group 6" id="6"/>
+          <p:cNvPr id="6" name="Group 6"/>
           <p:cNvGrpSpPr/>
           <p:nvPr/>
         </p:nvGrpSpPr>
         <p:grpSpPr>
-          <a:xfrm rot="0">
+          <a:xfrm>
             <a:off x="-1543050" y="-558218"/>
             <a:ext cx="3086100" cy="11299900"/>
             <a:chOff x="0" y="0"/>
@@ -8755,12 +8719,12 @@
         </p:grpSpPr>
         <p:sp>
           <p:nvSpPr>
-            <p:cNvPr name="Freeform 7" id="7"/>
+            <p:cNvPr id="7" name="Freeform 7"/>
             <p:cNvSpPr/>
             <p:nvPr/>
           </p:nvSpPr>
           <p:spPr>
-            <a:xfrm flipH="false" flipV="false" rot="0">
+            <a:xfrm>
               <a:off x="0" y="0"/>
               <a:ext cx="812800" cy="2976105"/>
             </a:xfrm>
@@ -8769,9 +8733,9 @@
               <a:gdLst/>
               <a:ahLst/>
               <a:cxnLst/>
-              <a:rect r="r" b="b" t="t" l="l"/>
+              <a:rect l="l" t="t" r="r" b="b"/>
               <a:pathLst>
-                <a:path h="2976105" w="812800">
+                <a:path w="812800" h="2976105">
                   <a:moveTo>
                     <a:pt x="0" y="0"/>
                   </a:moveTo>
@@ -8795,8 +8759,8 @@
         </p:sp>
         <p:sp>
           <p:nvSpPr>
-            <p:cNvPr name="TextBox 8" id="8"/>
-            <p:cNvSpPr txBox="true"/>
+            <p:cNvPr id="8" name="TextBox 8"/>
+            <p:cNvSpPr txBox="1"/>
             <p:nvPr/>
           </p:nvSpPr>
           <p:spPr>
@@ -8809,7 +8773,7 @@
             </a:prstGeom>
           </p:spPr>
           <p:txBody>
-            <a:bodyPr anchor="ctr" rtlCol="false" tIns="50800" lIns="50800" bIns="50800" rIns="50800"/>
+            <a:bodyPr lIns="50800" tIns="50800" rIns="50800" bIns="50800" rtlCol="0" anchor="ctr"/>
             <a:lstStyle/>
             <a:p>
               <a:pPr algn="ctr">
@@ -8817,18 +8781,19 @@
                   <a:spcPts val="2859"/>
                 </a:lnSpc>
               </a:pPr>
+              <a:endParaRPr/>
             </a:p>
           </p:txBody>
         </p:sp>
       </p:grpSp>
       <p:grpSp>
         <p:nvGrpSpPr>
-          <p:cNvPr name="Group 9" id="9"/>
+          <p:cNvPr id="9" name="Group 9"/>
           <p:cNvGrpSpPr/>
           <p:nvPr/>
         </p:nvGrpSpPr>
         <p:grpSpPr>
-          <a:xfrm rot="0">
+          <a:xfrm>
             <a:off x="1227773" y="4163622"/>
             <a:ext cx="110236" cy="2818996"/>
             <a:chOff x="0" y="0"/>
@@ -8837,12 +8802,12 @@
         </p:grpSpPr>
         <p:sp>
           <p:nvSpPr>
-            <p:cNvPr name="Freeform 10" id="10"/>
+            <p:cNvPr id="10" name="Freeform 10"/>
             <p:cNvSpPr/>
             <p:nvPr/>
           </p:nvSpPr>
           <p:spPr>
-            <a:xfrm flipH="false" flipV="false" rot="0">
+            <a:xfrm>
               <a:off x="0" y="0"/>
               <a:ext cx="26312" cy="672855"/>
             </a:xfrm>
@@ -8851,9 +8816,9 @@
               <a:gdLst/>
               <a:ahLst/>
               <a:cxnLst/>
-              <a:rect r="r" b="b" t="t" l="l"/>
+              <a:rect l="l" t="t" r="r" b="b"/>
               <a:pathLst>
-                <a:path h="672855" w="26312">
+                <a:path w="26312" h="672855">
                   <a:moveTo>
                     <a:pt x="0" y="0"/>
                   </a:moveTo>
@@ -8877,8 +8842,8 @@
         </p:sp>
         <p:sp>
           <p:nvSpPr>
-            <p:cNvPr name="TextBox 11" id="11"/>
-            <p:cNvSpPr txBox="true"/>
+            <p:cNvPr id="11" name="TextBox 11"/>
+            <p:cNvSpPr txBox="1"/>
             <p:nvPr/>
           </p:nvSpPr>
           <p:spPr>
@@ -8891,7 +8856,7 @@
             </a:prstGeom>
           </p:spPr>
           <p:txBody>
-            <a:bodyPr anchor="ctr" rtlCol="false" tIns="50800" lIns="50800" bIns="50800" rIns="50800"/>
+            <a:bodyPr lIns="50800" tIns="50800" rIns="50800" bIns="50800" rtlCol="0" anchor="ctr"/>
             <a:lstStyle/>
             <a:p>
               <a:pPr algn="ctr">
@@ -8899,18 +8864,19 @@
                   <a:spcPts val="2859"/>
                 </a:lnSpc>
               </a:pPr>
+              <a:endParaRPr/>
             </a:p>
           </p:txBody>
         </p:sp>
       </p:grpSp>
       <p:sp>
         <p:nvSpPr>
-          <p:cNvPr name="Freeform 12" id="12"/>
+          <p:cNvPr id="12" name="Freeform 12"/>
           <p:cNvSpPr/>
           <p:nvPr/>
         </p:nvSpPr>
         <p:spPr>
-          <a:xfrm flipH="false" flipV="false" rot="0">
+          <a:xfrm>
             <a:off x="-2777871" y="-207071"/>
             <a:ext cx="3806571" cy="2083232"/>
           </a:xfrm>
@@ -8919,9 +8885,9 @@
             <a:gdLst/>
             <a:ahLst/>
             <a:cxnLst/>
-            <a:rect r="r" b="b" t="t" l="l"/>
+            <a:rect l="l" t="t" r="r" b="b"/>
             <a:pathLst>
-              <a:path h="2083232" w="3806571">
+              <a:path w="3806571" h="2083232">
                 <a:moveTo>
                   <a:pt x="0" y="0"/>
                 </a:moveTo>
@@ -8942,27 +8908,27 @@
             </a:pathLst>
           </a:custGeom>
           <a:blipFill>
-            <a:blip r:embed="rId4">
+            <a:blip>
               <a:extLst>
                 <a:ext uri="{96DAC541-7B7A-43D3-8B79-37D633B846F1}">
-                  <asvg:svgBlip xmlns:asvg="http://schemas.microsoft.com/office/drawing/2016/SVG/main" r:embed="rId5"/>
+                  <asvg:svgBlip xmlns:asvg="http://schemas.microsoft.com/office/drawing/2016/SVG/main" r:embed="rId3"/>
                 </a:ext>
               </a:extLst>
             </a:blip>
             <a:stretch>
-              <a:fillRect l="0" t="0" r="0" b="0"/>
+              <a:fillRect/>
             </a:stretch>
           </a:blipFill>
         </p:spPr>
       </p:sp>
       <p:sp>
         <p:nvSpPr>
-          <p:cNvPr name="Freeform 13" id="13"/>
+          <p:cNvPr id="13" name="Freeform 13"/>
           <p:cNvSpPr/>
           <p:nvPr/>
         </p:nvSpPr>
         <p:spPr>
-          <a:xfrm flipH="false" flipV="false" rot="0">
+          <a:xfrm>
             <a:off x="9092565" y="3086100"/>
             <a:ext cx="102870" cy="4114800"/>
           </a:xfrm>
@@ -8971,9 +8937,9 @@
             <a:gdLst/>
             <a:ahLst/>
             <a:cxnLst/>
-            <a:rect r="r" b="b" t="t" l="l"/>
+            <a:rect l="l" t="t" r="r" b="b"/>
             <a:pathLst>
-              <a:path h="4114800" w="102870">
+              <a:path w="102870" h="4114800">
                 <a:moveTo>
                   <a:pt x="0" y="0"/>
                 </a:moveTo>
@@ -8994,27 +8960,27 @@
             </a:pathLst>
           </a:custGeom>
           <a:blipFill>
-            <a:blip r:embed="rId6">
+            <a:blip>
               <a:extLst>
                 <a:ext uri="{96DAC541-7B7A-43D3-8B79-37D633B846F1}">
-                  <asvg:svgBlip xmlns:asvg="http://schemas.microsoft.com/office/drawing/2016/SVG/main" r:embed="rId7"/>
+                  <asvg:svgBlip xmlns:asvg="http://schemas.microsoft.com/office/drawing/2016/SVG/main" r:embed="rId4"/>
                 </a:ext>
               </a:extLst>
             </a:blip>
             <a:stretch>
-              <a:fillRect l="0" t="0" r="0" b="0"/>
+              <a:fillRect/>
             </a:stretch>
           </a:blipFill>
         </p:spPr>
       </p:sp>
       <p:sp>
         <p:nvSpPr>
-          <p:cNvPr name="TextBox 14" id="14"/>
-          <p:cNvSpPr txBox="true"/>
+          <p:cNvPr id="14" name="TextBox 14"/>
+          <p:cNvSpPr txBox="1"/>
           <p:nvPr/>
         </p:nvSpPr>
         <p:spPr>
-          <a:xfrm rot="0">
+          <a:xfrm>
             <a:off x="2159871" y="255519"/>
             <a:ext cx="10680483" cy="1484641"/>
           </a:xfrm>
@@ -9023,12 +8989,12 @@
           </a:prstGeom>
         </p:spPr>
         <p:txBody>
-          <a:bodyPr anchor="t" rtlCol="false" tIns="0" lIns="0" bIns="0" rIns="0">
+          <a:bodyPr lIns="0" tIns="0" rIns="0" bIns="0" rtlCol="0" anchor="t">
             <a:spAutoFit/>
           </a:bodyPr>
           <a:lstStyle/>
           <a:p>
-            <a:pPr algn="l" marL="0" indent="0" lvl="0">
+            <a:pPr marL="0" lvl="0" indent="0" algn="l">
               <a:lnSpc>
                 <a:spcPts val="5826"/>
               </a:lnSpc>
@@ -9037,7 +9003,7 @@
               </a:spcBef>
             </a:pPr>
             <a:r>
-              <a:rPr lang="en-US" b="true" sz="4221" spc="21">
+              <a:rPr lang="en-US" sz="4221" b="1" spc="21">
                 <a:solidFill>
                   <a:srgbClr val="1C5739"/>
                 </a:solidFill>
@@ -9053,12 +9019,12 @@
       </p:sp>
       <p:sp>
         <p:nvSpPr>
-          <p:cNvPr name="TextBox 15" id="15"/>
-          <p:cNvSpPr txBox="true"/>
+          <p:cNvPr id="15" name="TextBox 15"/>
+          <p:cNvSpPr txBox="1"/>
           <p:nvPr/>
         </p:nvSpPr>
         <p:spPr>
-          <a:xfrm rot="0">
+          <a:xfrm>
             <a:off x="1882698" y="2115917"/>
             <a:ext cx="6811269" cy="7186423"/>
           </a:xfrm>
@@ -9067,12 +9033,12 @@
           </a:prstGeom>
         </p:spPr>
         <p:txBody>
-          <a:bodyPr anchor="t" rtlCol="false" tIns="0" lIns="0" bIns="0" rIns="0">
+          <a:bodyPr lIns="0" tIns="0" rIns="0" bIns="0" rtlCol="0" anchor="t">
             <a:spAutoFit/>
           </a:bodyPr>
           <a:lstStyle/>
           <a:p>
-            <a:pPr algn="just" marL="539748" indent="-269874" lvl="1">
+            <a:pPr marL="539748" lvl="1" indent="-269874" algn="just">
               <a:lnSpc>
                 <a:spcPts val="4524"/>
               </a:lnSpc>
@@ -9080,7 +9046,7 @@
               <a:buChar char="•"/>
             </a:pPr>
             <a:r>
-              <a:rPr lang="en-US" b="true" sz="2499" spc="144">
+              <a:rPr lang="en-US" sz="2499" b="1" spc="144">
                 <a:solidFill>
                   <a:srgbClr val="231F20"/>
                 </a:solidFill>
@@ -9105,7 +9071,7 @@
             </a:r>
           </a:p>
           <a:p>
-            <a:pPr algn="just" marL="474979" indent="-237490" lvl="1">
+            <a:pPr marL="474979" lvl="1" indent="-237490" algn="just">
               <a:lnSpc>
                 <a:spcPts val="3981"/>
               </a:lnSpc>
@@ -9113,7 +9079,7 @@
               <a:buChar char="•"/>
             </a:pPr>
             <a:r>
-              <a:rPr lang="en-US" b="true" sz="2199" spc="127">
+              <a:rPr lang="en-US" sz="2199" b="1" spc="127">
                 <a:solidFill>
                   <a:srgbClr val="231F20"/>
                 </a:solidFill>
@@ -9134,23 +9100,11 @@
                 <a:cs typeface="Open Sauce"/>
                 <a:sym typeface="Open Sauce"/>
               </a:rPr>
-              <a:t>: Calculates a</a:t>
-            </a:r>
-            <a:r>
-              <a:rPr lang="en-US" sz="2199" spc="127">
-                <a:solidFill>
-                  <a:srgbClr val="231F20"/>
-                </a:solidFill>
-                <a:latin typeface="Open Sauce"/>
-                <a:ea typeface="Open Sauce"/>
-                <a:cs typeface="Open Sauce"/>
-                <a:sym typeface="Open Sauce"/>
-              </a:rPr>
-              <a:t> provider's historical billing velocity (billing rate/day) rather than relying on static historical totals. </a:t>
-            </a:r>
-          </a:p>
-          <a:p>
-            <a:pPr algn="just" marL="474979" indent="-237490" lvl="1">
+              <a:t>: Calculates a provider's historical billing velocity (billing rate/day) rather than relying on static historical totals. </a:t>
+            </a:r>
+          </a:p>
+          <a:p>
+            <a:pPr marL="474979" lvl="1" indent="-237490" algn="just">
               <a:lnSpc>
                 <a:spcPts val="3981"/>
               </a:lnSpc>
@@ -9158,7 +9112,7 @@
               <a:buChar char="•"/>
             </a:pPr>
             <a:r>
-              <a:rPr lang="en-US" b="true" sz="2199" spc="127">
+              <a:rPr lang="en-US" sz="2199" b="1" spc="127">
                 <a:solidFill>
                   <a:srgbClr val="231F20"/>
                 </a:solidFill>
@@ -9183,7 +9137,7 @@
             </a:r>
           </a:p>
           <a:p>
-            <a:pPr algn="just" marL="474979" indent="-237490" lvl="1">
+            <a:pPr marL="474979" lvl="1" indent="-237490" algn="just">
               <a:lnSpc>
                 <a:spcPts val="3981"/>
               </a:lnSpc>
@@ -9191,7 +9145,7 @@
               <a:buChar char="•"/>
             </a:pPr>
             <a:r>
-              <a:rPr lang="en-US" b="true" sz="2199" spc="127">
+              <a:rPr lang="en-US" sz="2199" b="1" spc="127">
                 <a:solidFill>
                   <a:srgbClr val="231F20"/>
                 </a:solidFill>
@@ -9221,17 +9175,26 @@
                 <a:spcPts val="4162"/>
               </a:lnSpc>
             </a:pPr>
+            <a:endParaRPr lang="en-US" sz="2199" spc="127">
+              <a:solidFill>
+                <a:srgbClr val="231F20"/>
+              </a:solidFill>
+              <a:latin typeface="Open Sauce"/>
+              <a:ea typeface="Open Sauce"/>
+              <a:cs typeface="Open Sauce"/>
+              <a:sym typeface="Open Sauce"/>
+            </a:endParaRPr>
           </a:p>
         </p:txBody>
       </p:sp>
       <p:sp>
         <p:nvSpPr>
-          <p:cNvPr name="TextBox 16" id="16"/>
-          <p:cNvSpPr txBox="true"/>
+          <p:cNvPr id="16" name="TextBox 16"/>
+          <p:cNvSpPr txBox="1"/>
           <p:nvPr/>
         </p:nvSpPr>
         <p:spPr>
-          <a:xfrm rot="0">
+          <a:xfrm>
             <a:off x="9272433" y="2049242"/>
             <a:ext cx="6686056" cy="7319773"/>
           </a:xfrm>
@@ -9240,12 +9203,12 @@
           </a:prstGeom>
         </p:spPr>
         <p:txBody>
-          <a:bodyPr anchor="t" rtlCol="false" tIns="0" lIns="0" bIns="0" rIns="0">
+          <a:bodyPr lIns="0" tIns="0" rIns="0" bIns="0" rtlCol="0" anchor="t">
             <a:spAutoFit/>
           </a:bodyPr>
           <a:lstStyle/>
           <a:p>
-            <a:pPr algn="just" marL="539748" indent="-269874" lvl="1">
+            <a:pPr marL="539748" lvl="1" indent="-269874" algn="just">
               <a:lnSpc>
                 <a:spcPts val="4524"/>
               </a:lnSpc>
@@ -9253,7 +9216,7 @@
               <a:buChar char="•"/>
             </a:pPr>
             <a:r>
-              <a:rPr lang="en-US" b="true" sz="2499" spc="144">
+              <a:rPr lang="en-US" sz="2499" b="1" spc="144">
                 <a:solidFill>
                   <a:srgbClr val="231F20"/>
                 </a:solidFill>
@@ -9277,7 +9240,7 @@
               <a:t> </a:t>
             </a:r>
             <a:r>
-              <a:rPr lang="en-US" b="true" sz="2499" spc="144">
+              <a:rPr lang="en-US" sz="2499" b="1" spc="144">
                 <a:solidFill>
                   <a:srgbClr val="231F20"/>
                 </a:solidFill>
@@ -9290,7 +9253,7 @@
             </a:r>
           </a:p>
           <a:p>
-            <a:pPr algn="just" marL="474979" indent="-237490" lvl="1">
+            <a:pPr marL="474979" lvl="1" indent="-237490" algn="just">
               <a:lnSpc>
                 <a:spcPts val="3981"/>
               </a:lnSpc>
@@ -9298,7 +9261,7 @@
               <a:buChar char="•"/>
             </a:pPr>
             <a:r>
-              <a:rPr lang="en-US" b="true" sz="2199" spc="127">
+              <a:rPr lang="en-US" sz="2199" b="1" spc="127">
                 <a:solidFill>
                   <a:srgbClr val="231F20"/>
                 </a:solidFill>
@@ -9307,19 +9270,7 @@
                 <a:cs typeface="Open Sauce Bold"/>
                 <a:sym typeface="Open Sauce Bold"/>
               </a:rPr>
-              <a:t>Un</a:t>
-            </a:r>
-            <a:r>
-              <a:rPr lang="en-US" b="true" sz="2199" spc="127">
-                <a:solidFill>
-                  <a:srgbClr val="231F20"/>
-                </a:solidFill>
-                <a:latin typeface="Open Sauce Bold"/>
-                <a:ea typeface="Open Sauce Bold"/>
-                <a:cs typeface="Open Sauce Bold"/>
-                <a:sym typeface="Open Sauce Bold"/>
-              </a:rPr>
-              <a:t>ified Context Payload</a:t>
+              <a:t>Unified Context Payload</a:t>
             </a:r>
             <a:r>
               <a:rPr lang="en-US" sz="2199" spc="127">
@@ -9335,7 +9286,7 @@
             </a:r>
           </a:p>
           <a:p>
-            <a:pPr algn="just" marL="474979" indent="-237490" lvl="1">
+            <a:pPr marL="474979" lvl="1" indent="-237490" algn="just">
               <a:lnSpc>
                 <a:spcPts val="3981"/>
               </a:lnSpc>
@@ -9343,7 +9294,7 @@
               <a:buChar char="•"/>
             </a:pPr>
             <a:r>
-              <a:rPr lang="en-US" b="true" sz="2199" spc="127">
+              <a:rPr lang="en-US" sz="2199" b="1" spc="127">
                 <a:solidFill>
                   <a:srgbClr val="231F20"/>
                 </a:solidFill>
@@ -9373,6 +9324,15 @@
                 <a:spcPts val="4162"/>
               </a:lnSpc>
             </a:pPr>
+            <a:endParaRPr lang="en-US" sz="2199" spc="127">
+              <a:solidFill>
+                <a:srgbClr val="231F20"/>
+              </a:solidFill>
+              <a:latin typeface="Open Sauce"/>
+              <a:ea typeface="Open Sauce"/>
+              <a:cs typeface="Open Sauce"/>
+              <a:sym typeface="Open Sauce"/>
+            </a:endParaRPr>
           </a:p>
         </p:txBody>
       </p:sp>
@@ -9385,13 +9345,14 @@
 </file>
 
 <file path=ppt/slides/slide7.xml><?xml version="1.0" encoding="utf-8"?>
-<p:sld xmlns:p="http://schemas.openxmlformats.org/presentationml/2006/main" xmlns:a="http://schemas.openxmlformats.org/drawingml/2006/main" xmlns:r="http://schemas.openxmlformats.org/officeDocument/2006/relationships">
+<p:sld xmlns:a="http://schemas.openxmlformats.org/drawingml/2006/main" xmlns:r="http://schemas.openxmlformats.org/officeDocument/2006/relationships" xmlns:p="http://schemas.openxmlformats.org/presentationml/2006/main">
   <p:cSld>
     <p:bg>
       <p:bgPr>
         <a:solidFill>
           <a:srgbClr val="FDFBFB"/>
         </a:solidFill>
+        <a:effectLst/>
       </p:bgPr>
     </p:bg>
     <p:spTree>
@@ -9410,12 +9371,12 @@
       </p:grpSpPr>
       <p:grpSp>
         <p:nvGrpSpPr>
-          <p:cNvPr name="Group 2" id="2"/>
+          <p:cNvPr id="2" name="Group 2"/>
           <p:cNvGrpSpPr/>
           <p:nvPr/>
         </p:nvGrpSpPr>
         <p:grpSpPr>
-          <a:xfrm rot="0">
+          <a:xfrm>
             <a:off x="16588201" y="-3286592"/>
             <a:ext cx="6306960" cy="6309618"/>
             <a:chOff x="0" y="0"/>
@@ -9424,12 +9385,12 @@
         </p:grpSpPr>
         <p:sp>
           <p:nvSpPr>
-            <p:cNvPr name="Freeform 3" id="3"/>
+            <p:cNvPr id="3" name="Freeform 3"/>
             <p:cNvSpPr/>
             <p:nvPr/>
           </p:nvSpPr>
           <p:spPr>
-            <a:xfrm flipH="false" flipV="false" rot="0">
+            <a:xfrm>
               <a:off x="0" y="508"/>
               <a:ext cx="6832726" cy="6835140"/>
             </a:xfrm>
@@ -9438,9 +9399,9 @@
               <a:gdLst/>
               <a:ahLst/>
               <a:cxnLst/>
-              <a:rect r="r" b="b" t="t" l="l"/>
+              <a:rect l="l" t="t" r="r" b="b"/>
               <a:pathLst>
-                <a:path h="6835140" w="6832726">
+                <a:path w="6832726" h="6835140">
                   <a:moveTo>
                     <a:pt x="3408807" y="6835140"/>
                   </a:moveTo>
@@ -12278,12 +12239,12 @@
       </p:grpSp>
       <p:grpSp>
         <p:nvGrpSpPr>
-          <p:cNvPr name="Group 4" id="4"/>
+          <p:cNvPr id="4" name="Group 4"/>
           <p:cNvGrpSpPr/>
           <p:nvPr/>
         </p:nvGrpSpPr>
         <p:grpSpPr>
-          <a:xfrm rot="0">
+          <a:xfrm>
             <a:off x="17259300" y="-2366249"/>
             <a:ext cx="4512106" cy="4512106"/>
             <a:chOff x="0" y="0"/>
@@ -12292,12 +12253,12 @@
         </p:grpSpPr>
         <p:sp>
           <p:nvSpPr>
-            <p:cNvPr name="Freeform 5" id="5"/>
+            <p:cNvPr id="5" name="Freeform 5"/>
             <p:cNvSpPr/>
             <p:nvPr/>
           </p:nvSpPr>
           <p:spPr>
-            <a:xfrm flipH="false" flipV="false" rot="0">
+            <a:xfrm>
               <a:off x="0" y="0"/>
               <a:ext cx="812800" cy="812800"/>
             </a:xfrm>
@@ -12306,9 +12267,9 @@
               <a:gdLst/>
               <a:ahLst/>
               <a:cxnLst/>
-              <a:rect r="r" b="b" t="t" l="l"/>
+              <a:rect l="l" t="t" r="r" b="b"/>
               <a:pathLst>
-                <a:path h="812800" w="812800">
+                <a:path w="812800" h="812800">
                   <a:moveTo>
                     <a:pt x="406400" y="0"/>
                   </a:moveTo>
@@ -12350,8 +12311,8 @@
         </p:sp>
         <p:sp>
           <p:nvSpPr>
-            <p:cNvPr name="TextBox 6" id="6"/>
-            <p:cNvSpPr txBox="true"/>
+            <p:cNvPr id="6" name="TextBox 6"/>
+            <p:cNvSpPr txBox="1"/>
             <p:nvPr/>
           </p:nvSpPr>
           <p:spPr>
@@ -12364,7 +12325,7 @@
             </a:prstGeom>
           </p:spPr>
           <p:txBody>
-            <a:bodyPr anchor="ctr" rtlCol="false" tIns="50800" lIns="50800" bIns="50800" rIns="50800"/>
+            <a:bodyPr lIns="50800" tIns="50800" rIns="50800" bIns="50800" rtlCol="0" anchor="ctr"/>
             <a:lstStyle/>
             <a:p>
               <a:pPr algn="ctr">
@@ -12372,18 +12333,19 @@
                   <a:spcPts val="2859"/>
                 </a:lnSpc>
               </a:pPr>
+              <a:endParaRPr/>
             </a:p>
           </p:txBody>
         </p:sp>
       </p:grpSp>
       <p:sp>
         <p:nvSpPr>
-          <p:cNvPr name="TextBox 7" id="7"/>
-          <p:cNvSpPr txBox="true"/>
+          <p:cNvPr id="7" name="TextBox 7"/>
+          <p:cNvSpPr txBox="1"/>
           <p:nvPr/>
         </p:nvSpPr>
         <p:spPr>
-          <a:xfrm rot="0">
+          <a:xfrm>
             <a:off x="2059222" y="169979"/>
             <a:ext cx="15385050" cy="1789200"/>
           </a:xfrm>
@@ -12392,12 +12354,12 @@
           </a:prstGeom>
         </p:spPr>
         <p:txBody>
-          <a:bodyPr anchor="t" rtlCol="false" tIns="0" lIns="0" bIns="0" rIns="0">
+          <a:bodyPr lIns="0" tIns="0" rIns="0" bIns="0" rtlCol="0" anchor="t">
             <a:spAutoFit/>
           </a:bodyPr>
           <a:lstStyle/>
           <a:p>
-            <a:pPr algn="l" marL="0" indent="0" lvl="0">
+            <a:pPr marL="0" lvl="0" indent="0" algn="l">
               <a:lnSpc>
                 <a:spcPts val="6990"/>
               </a:lnSpc>
@@ -12406,7 +12368,7 @@
               </a:spcBef>
             </a:pPr>
             <a:r>
-              <a:rPr lang="en-US" b="true" sz="5065" spc="496">
+              <a:rPr lang="en-US" sz="5065" b="1" spc="496">
                 <a:solidFill>
                   <a:srgbClr val="231F20"/>
                 </a:solidFill>
@@ -12422,12 +12384,12 @@
       </p:sp>
       <p:sp>
         <p:nvSpPr>
-          <p:cNvPr name="Freeform 8" id="8"/>
+          <p:cNvPr id="8" name="Freeform 8"/>
           <p:cNvSpPr/>
           <p:nvPr/>
         </p:nvSpPr>
         <p:spPr>
-          <a:xfrm flipH="false" flipV="false" rot="0">
+          <a:xfrm>
             <a:off x="16322124" y="7754894"/>
             <a:ext cx="4118443" cy="3654183"/>
           </a:xfrm>
@@ -12436,9 +12398,9 @@
             <a:gdLst/>
             <a:ahLst/>
             <a:cxnLst/>
-            <a:rect r="r" b="b" t="t" l="l"/>
+            <a:rect l="l" t="t" r="r" b="b"/>
             <a:pathLst>
-              <a:path h="3654183" w="4118443">
+              <a:path w="4118443" h="3654183">
                 <a:moveTo>
                   <a:pt x="0" y="0"/>
                 </a:moveTo>
@@ -12459,27 +12421,27 @@
             </a:pathLst>
           </a:custGeom>
           <a:blipFill>
-            <a:blip r:embed="rId2">
+            <a:blip>
               <a:extLst>
                 <a:ext uri="{96DAC541-7B7A-43D3-8B79-37D633B846F1}">
-                  <asvg:svgBlip xmlns:asvg="http://schemas.microsoft.com/office/drawing/2016/SVG/main" r:embed="rId3"/>
+                  <asvg:svgBlip xmlns:asvg="http://schemas.microsoft.com/office/drawing/2016/SVG/main" r:embed="rId2"/>
                 </a:ext>
               </a:extLst>
             </a:blip>
             <a:stretch>
-              <a:fillRect l="0" t="0" r="0" b="0"/>
+              <a:fillRect/>
             </a:stretch>
           </a:blipFill>
         </p:spPr>
       </p:sp>
       <p:sp>
         <p:nvSpPr>
-          <p:cNvPr name="Freeform 9" id="9"/>
+          <p:cNvPr id="9" name="Freeform 9"/>
           <p:cNvSpPr/>
           <p:nvPr/>
         </p:nvSpPr>
         <p:spPr>
-          <a:xfrm flipH="true" flipV="true" rot="0">
+          <a:xfrm flipH="1" flipV="1">
             <a:off x="-2059222" y="-798391"/>
             <a:ext cx="4118443" cy="3654183"/>
           </a:xfrm>
@@ -12488,9 +12450,9 @@
             <a:gdLst/>
             <a:ahLst/>
             <a:cxnLst/>
-            <a:rect r="r" b="b" t="t" l="l"/>
+            <a:rect l="l" t="t" r="r" b="b"/>
             <a:pathLst>
-              <a:path h="3654183" w="4118443">
+              <a:path w="4118443" h="3654183">
                 <a:moveTo>
                   <a:pt x="4118444" y="3654182"/>
                 </a:moveTo>
@@ -12511,28 +12473,28 @@
             </a:pathLst>
           </a:custGeom>
           <a:blipFill>
-            <a:blip r:embed="rId2">
+            <a:blip>
               <a:extLst>
                 <a:ext uri="{96DAC541-7B7A-43D3-8B79-37D633B846F1}">
-                  <asvg:svgBlip xmlns:asvg="http://schemas.microsoft.com/office/drawing/2016/SVG/main" r:embed="rId3"/>
+                  <asvg:svgBlip xmlns:asvg="http://schemas.microsoft.com/office/drawing/2016/SVG/main" r:embed="rId2"/>
                 </a:ext>
               </a:extLst>
             </a:blip>
             <a:stretch>
-              <a:fillRect l="0" t="0" r="0" b="0"/>
+              <a:fillRect/>
             </a:stretch>
           </a:blipFill>
         </p:spPr>
       </p:sp>
       <p:sp>
         <p:nvSpPr>
-          <p:cNvPr name="TextBox 10" id="10"/>
-          <p:cNvSpPr txBox="true"/>
+          <p:cNvPr id="10" name="TextBox 10"/>
+          <p:cNvSpPr txBox="1"/>
           <p:nvPr/>
         </p:nvSpPr>
         <p:spPr>
-          <a:xfrm rot="0">
-            <a:off x="466346" y="2722441"/>
+          <a:xfrm>
+            <a:off x="246752" y="2722441"/>
             <a:ext cx="8677654" cy="6555994"/>
           </a:xfrm>
           <a:prstGeom prst="rect">
@@ -12540,7 +12502,7 @@
           </a:prstGeom>
         </p:spPr>
         <p:txBody>
-          <a:bodyPr anchor="t" rtlCol="false" tIns="0" lIns="0" bIns="0" rIns="0">
+          <a:bodyPr lIns="0" tIns="0" rIns="0" bIns="0" rtlCol="0" anchor="t">
             <a:spAutoFit/>
           </a:bodyPr>
           <a:lstStyle/>
@@ -12551,7 +12513,7 @@
               </a:lnSpc>
             </a:pPr>
             <a:r>
-              <a:rPr lang="en-US" b="true" sz="2299" spc="133">
+              <a:rPr lang="en-US" sz="2299" b="1" spc="133" dirty="0">
                 <a:solidFill>
                   <a:srgbClr val="231F20"/>
                 </a:solidFill>
@@ -12564,7 +12526,7 @@
             </a:r>
           </a:p>
           <a:p>
-            <a:pPr algn="just" marL="474979" indent="-237490" lvl="1">
+            <a:pPr marL="474979" lvl="1" indent="-237490" algn="just">
               <a:lnSpc>
                 <a:spcPts val="3981"/>
               </a:lnSpc>
@@ -12572,7 +12534,7 @@
               <a:buChar char="•"/>
             </a:pPr>
             <a:r>
-              <a:rPr lang="en-US" sz="2199" spc="127">
+              <a:rPr lang="en-US" sz="2199" spc="127" dirty="0">
                 <a:solidFill>
                   <a:srgbClr val="231F20"/>
                 </a:solidFill>
@@ -12581,19 +12543,7 @@
                 <a:cs typeface="Open Sauce"/>
                 <a:sym typeface="Open Sauce"/>
               </a:rPr>
-              <a:t>Vector similarity retriever matching CMS</a:t>
-            </a:r>
-            <a:r>
-              <a:rPr lang="en-US" sz="2199" spc="127">
-                <a:solidFill>
-                  <a:srgbClr val="231F20"/>
-                </a:solidFill>
-                <a:latin typeface="Open Sauce"/>
-                <a:ea typeface="Open Sauce"/>
-                <a:cs typeface="Open Sauce"/>
-                <a:sym typeface="Open Sauce"/>
-              </a:rPr>
-              <a:t> policy documents (NCD 190.3, FWA Rule 42) directly to flagged claims. </a:t>
+              <a:t>Vector similarity retriever matching CMS policy documents (NCD 190.3, FWA Rule 42) directly to flagged claims. </a:t>
             </a:r>
           </a:p>
           <a:p>
@@ -12603,7 +12553,7 @@
               </a:lnSpc>
             </a:pPr>
             <a:r>
-              <a:rPr lang="en-US" b="true" sz="2199" spc="127">
+              <a:rPr lang="en-US" sz="2199" b="1" spc="127" dirty="0">
                 <a:solidFill>
                   <a:srgbClr val="231F20"/>
                 </a:solidFill>
@@ -12616,7 +12566,7 @@
             </a:r>
           </a:p>
           <a:p>
-            <a:pPr algn="just" marL="474979" indent="-237490" lvl="1">
+            <a:pPr marL="474979" lvl="1" indent="-237490" algn="just">
               <a:lnSpc>
                 <a:spcPts val="3981"/>
               </a:lnSpc>
@@ -12624,7 +12574,7 @@
               <a:buChar char="•"/>
             </a:pPr>
             <a:r>
-              <a:rPr lang="en-US" sz="2199" spc="127">
+              <a:rPr lang="en-US" sz="2199" spc="127" dirty="0">
                 <a:solidFill>
                   <a:srgbClr val="231F20"/>
                 </a:solidFill>
@@ -12633,10 +12583,19 @@
                 <a:cs typeface="Open Sauce"/>
                 <a:sym typeface="Open Sauce"/>
               </a:rPr>
-              <a:t>Au</a:t>
-            </a:r>
-            <a:r>
-              <a:rPr lang="en-US" sz="2199" spc="127">
+              <a:t>Automatically compiles/updates Markdown summaries (NPI_{id}.md) upon investigator action (APPROVE, PAUSE_PAYMENT, REFER_TO_SIU). </a:t>
+            </a:r>
+          </a:p>
+          <a:p>
+            <a:pPr marL="474979" lvl="1" indent="-237490" algn="just">
+              <a:lnSpc>
+                <a:spcPts val="3981"/>
+              </a:lnSpc>
+              <a:buFont typeface="Arial"/>
+              <a:buChar char="•"/>
+            </a:pPr>
+            <a:r>
+              <a:rPr lang="en-US" sz="2199" spc="127" dirty="0">
                 <a:solidFill>
                   <a:srgbClr val="231F20"/>
                 </a:solidFill>
@@ -12645,19 +12604,10 @@
                 <a:cs typeface="Open Sauce"/>
                 <a:sym typeface="Open Sauce"/>
               </a:rPr>
-              <a:t>tomatically compiles/updates Markdown summaries (NPI_{id}.md) upon investigator action (APPROVE, PAUSE_PAYMENT, REFER_TO_SIU). </a:t>
-            </a:r>
-          </a:p>
-          <a:p>
-            <a:pPr algn="just" marL="474979" indent="-237490" lvl="1">
-              <a:lnSpc>
-                <a:spcPts val="3981"/>
-              </a:lnSpc>
-              <a:buFont typeface="Arial"/>
-              <a:buChar char="•"/>
-            </a:pPr>
-            <a:r>
-              <a:rPr lang="en-US" sz="2199" spc="127">
+              <a:t>Tracks behavioral trends, decision history with AI confidence scores, and entity backlinks ([[</a:t>
+            </a:r>
+            <a:r>
+              <a:rPr lang="en-US" sz="2199" spc="127" dirty="0" err="1">
                 <a:solidFill>
                   <a:srgbClr val="231F20"/>
                 </a:solidFill>
@@ -12666,10 +12616,10 @@
                 <a:cs typeface="Open Sauce"/>
                 <a:sym typeface="Open Sauce"/>
               </a:rPr>
-              <a:t>Track</a:t>
-            </a:r>
-            <a:r>
-              <a:rPr lang="en-US" sz="2199" spc="127">
+              <a:t>fraud_rings</a:t>
+            </a:r>
+            <a:r>
+              <a:rPr lang="en-US" sz="2199" spc="127" dirty="0">
                 <a:solidFill>
                   <a:srgbClr val="231F20"/>
                 </a:solidFill>
@@ -12678,7 +12628,7 @@
                 <a:cs typeface="Open Sauce"/>
                 <a:sym typeface="Open Sauce"/>
               </a:rPr>
-              <a:t>s behavioral trends, decision history with AI confidence scores, and entity backlinks ([[fraud_rings/...]]). </a:t>
+              <a:t>/...]]). </a:t>
             </a:r>
           </a:p>
           <a:p>
@@ -12687,50 +12637,59 @@
                 <a:spcPts val="4162"/>
               </a:lnSpc>
             </a:pPr>
+            <a:endParaRPr lang="en-US" sz="2199" spc="127" dirty="0">
+              <a:solidFill>
+                <a:srgbClr val="231F20"/>
+              </a:solidFill>
+              <a:latin typeface="Open Sauce"/>
+              <a:ea typeface="Open Sauce"/>
+              <a:cs typeface="Open Sauce"/>
+              <a:sym typeface="Open Sauce"/>
+            </a:endParaRPr>
           </a:p>
         </p:txBody>
       </p:sp>
       <p:sp>
         <p:nvSpPr>
-          <p:cNvPr name="AutoShape 11" id="11"/>
+          <p:cNvPr id="11" name="AutoShape 11"/>
           <p:cNvSpPr/>
           <p:nvPr/>
         </p:nvSpPr>
         <p:spPr>
-          <a:xfrm flipV="true">
+          <a:xfrm flipV="1">
             <a:off x="9144000" y="2475815"/>
             <a:ext cx="0" cy="6492240"/>
           </a:xfrm>
           <a:prstGeom prst="line">
             <a:avLst/>
           </a:prstGeom>
-          <a:ln cap="flat" w="76200">
+          <a:ln w="76200" cap="flat">
             <a:solidFill>
               <a:srgbClr val="397D5A"/>
             </a:solidFill>
             <a:prstDash val="solid"/>
-            <a:headEnd type="none" len="sm" w="sm"/>
-            <a:tailEnd type="none" len="sm" w="sm"/>
+            <a:headEnd type="none" w="sm" len="sm"/>
+            <a:tailEnd type="none" w="sm" len="sm"/>
           </a:ln>
         </p:spPr>
       </p:sp>
       <p:sp>
         <p:nvSpPr>
-          <p:cNvPr name="TextBox 12" id="12"/>
-          <p:cNvSpPr txBox="true"/>
+          <p:cNvPr id="12" name="TextBox 12"/>
+          <p:cNvSpPr txBox="1"/>
           <p:nvPr/>
         </p:nvSpPr>
         <p:spPr>
-          <a:xfrm rot="0">
+          <a:xfrm>
             <a:off x="9751747" y="2722441"/>
-            <a:ext cx="7506186" cy="6089269"/>
+            <a:ext cx="7506186" cy="6188297"/>
           </a:xfrm>
           <a:prstGeom prst="rect">
             <a:avLst/>
           </a:prstGeom>
         </p:spPr>
         <p:txBody>
-          <a:bodyPr anchor="t" rtlCol="false" tIns="0" lIns="0" bIns="0" rIns="0">
+          <a:bodyPr lIns="0" tIns="0" rIns="0" bIns="0" rtlCol="0" anchor="t">
             <a:spAutoFit/>
           </a:bodyPr>
           <a:lstStyle/>
@@ -12741,7 +12700,7 @@
               </a:lnSpc>
             </a:pPr>
             <a:r>
-              <a:rPr lang="en-US" b="true" sz="2299" spc="133">
+              <a:rPr lang="en-US" sz="2299" b="1" spc="133" dirty="0">
                 <a:solidFill>
                   <a:srgbClr val="231F20"/>
                 </a:solidFill>
@@ -12750,19 +12709,7 @@
                 <a:cs typeface="Open Sauce Bold"/>
                 <a:sym typeface="Open Sauce Bold"/>
               </a:rPr>
-              <a:t>Responsible AI Guardrails &amp;</a:t>
-            </a:r>
-            <a:r>
-              <a:rPr lang="en-US" b="true" sz="2299" spc="133">
-                <a:solidFill>
-                  <a:srgbClr val="231F20"/>
-                </a:solidFill>
-                <a:latin typeface="Open Sauce Bold"/>
-                <a:ea typeface="Open Sauce Bold"/>
-                <a:cs typeface="Open Sauce Bold"/>
-                <a:sym typeface="Open Sauce Bold"/>
-              </a:rPr>
-              <a:t> Audit Ledger (app/services/guardrails.py)</a:t>
+              <a:t>Responsible AI Guardrails &amp; Audit Ledger (app/services/guardrails.py)</a:t>
             </a:r>
           </a:p>
           <a:p>
@@ -12771,9 +12718,18 @@
                 <a:spcPts val="4162"/>
               </a:lnSpc>
             </a:pPr>
-          </a:p>
-          <a:p>
-            <a:pPr algn="just" marL="474979" indent="-237490" lvl="1">
+            <a:endParaRPr lang="en-US" sz="2299" b="1" spc="133" dirty="0">
+              <a:solidFill>
+                <a:srgbClr val="231F20"/>
+              </a:solidFill>
+              <a:latin typeface="Open Sauce Bold"/>
+              <a:ea typeface="Open Sauce Bold"/>
+              <a:cs typeface="Open Sauce Bold"/>
+              <a:sym typeface="Open Sauce Bold"/>
+            </a:endParaRPr>
+          </a:p>
+          <a:p>
+            <a:pPr marL="474979" lvl="1" indent="-237490" algn="just">
               <a:lnSpc>
                 <a:spcPts val="3981"/>
               </a:lnSpc>
@@ -12781,7 +12737,7 @@
               <a:buChar char="•"/>
             </a:pPr>
             <a:r>
-              <a:rPr lang="en-US" sz="2199" spc="127">
+              <a:rPr lang="en-US" sz="2199" spc="127" dirty="0">
                 <a:solidFill>
                   <a:srgbClr val="231F20"/>
                 </a:solidFill>
@@ -12790,10 +12746,19 @@
                 <a:cs typeface="Open Sauce"/>
                 <a:sym typeface="Open Sauce"/>
               </a:rPr>
-              <a:t>Refusal Layer: Safety checks bl</a:t>
-            </a:r>
-            <a:r>
-              <a:rPr lang="en-US" sz="2199" spc="127">
+              <a:t>Refusal Layer: Safety checks block requests for clinical diagnosis or medical treatment advice while attaching confidence bounds (0-100%). </a:t>
+            </a:r>
+          </a:p>
+          <a:p>
+            <a:pPr marL="474979" lvl="1" indent="-237490" algn="just">
+              <a:lnSpc>
+                <a:spcPts val="3981"/>
+              </a:lnSpc>
+              <a:buFont typeface="Arial"/>
+              <a:buChar char="•"/>
+            </a:pPr>
+            <a:r>
+              <a:rPr lang="en-US" sz="2199" spc="127" dirty="0">
                 <a:solidFill>
                   <a:srgbClr val="231F20"/>
                 </a:solidFill>
@@ -12802,10 +12767,10 @@
                 <a:cs typeface="Open Sauce"/>
                 <a:sym typeface="Open Sauce"/>
               </a:rPr>
-              <a:t>ock requests f</a:t>
-            </a:r>
-            <a:r>
-              <a:rPr lang="en-US" sz="2199" spc="127">
+              <a:t>Audit Ledger (POST / </a:t>
+            </a:r>
+            <a:r>
+              <a:rPr lang="en-US" sz="2199" spc="127" dirty="0" err="1">
                 <a:solidFill>
                   <a:srgbClr val="231F20"/>
                 </a:solidFill>
@@ -12814,19 +12779,10 @@
                 <a:cs typeface="Open Sauce"/>
                 <a:sym typeface="Open Sauce"/>
               </a:rPr>
-              <a:t>or clinical diagnosis or medical treatment advice while attaching confidence bounds (0-100%). </a:t>
-            </a:r>
-          </a:p>
-          <a:p>
-            <a:pPr algn="just" marL="474979" indent="-237490" lvl="1">
-              <a:lnSpc>
-                <a:spcPts val="3981"/>
-              </a:lnSpc>
-              <a:buFont typeface="Arial"/>
-              <a:buChar char="•"/>
-            </a:pPr>
-            <a:r>
-              <a:rPr lang="en-US" sz="2199" spc="127">
+              <a:t>api</a:t>
+            </a:r>
+            <a:r>
+              <a:rPr lang="en-US" sz="2199" spc="127" dirty="0">
                 <a:solidFill>
                   <a:srgbClr val="231F20"/>
                 </a:solidFill>
@@ -12835,7 +12791,55 @@
                 <a:cs typeface="Open Sauce"/>
                 <a:sym typeface="Open Sauce"/>
               </a:rPr>
-              <a:t>Audit Ledger (POST /api/v1/cases/{case_id}/action): Stores investigator notes, timestamps, and decisions in an immutable log (audit_ledger.json). </a:t>
+              <a:t> / v1 / cases / {</a:t>
+            </a:r>
+            <a:r>
+              <a:rPr lang="en-US" sz="2199" spc="127" dirty="0" err="1">
+                <a:solidFill>
+                  <a:srgbClr val="231F20"/>
+                </a:solidFill>
+                <a:latin typeface="Open Sauce"/>
+                <a:ea typeface="Open Sauce"/>
+                <a:cs typeface="Open Sauce"/>
+                <a:sym typeface="Open Sauce"/>
+              </a:rPr>
+              <a:t>case_id</a:t>
+            </a:r>
+            <a:r>
+              <a:rPr lang="en-US" sz="2199" spc="127" dirty="0">
+                <a:solidFill>
+                  <a:srgbClr val="231F20"/>
+                </a:solidFill>
+                <a:latin typeface="Open Sauce"/>
+                <a:ea typeface="Open Sauce"/>
+                <a:cs typeface="Open Sauce"/>
+                <a:sym typeface="Open Sauce"/>
+              </a:rPr>
+              <a:t>} / action): Stores investigator notes, timestamps, and decisions in an immutable log (</a:t>
+            </a:r>
+            <a:r>
+              <a:rPr lang="en-US" sz="2199" spc="127" dirty="0" err="1">
+                <a:solidFill>
+                  <a:srgbClr val="231F20"/>
+                </a:solidFill>
+                <a:latin typeface="Open Sauce"/>
+                <a:ea typeface="Open Sauce"/>
+                <a:cs typeface="Open Sauce"/>
+                <a:sym typeface="Open Sauce"/>
+              </a:rPr>
+              <a:t>audit_ledger.json</a:t>
+            </a:r>
+            <a:r>
+              <a:rPr lang="en-US" sz="2199" spc="127" dirty="0">
+                <a:solidFill>
+                  <a:srgbClr val="231F20"/>
+                </a:solidFill>
+                <a:latin typeface="Open Sauce"/>
+                <a:ea typeface="Open Sauce"/>
+                <a:cs typeface="Open Sauce"/>
+                <a:sym typeface="Open Sauce"/>
+              </a:rPr>
+              <a:t>). </a:t>
             </a:r>
           </a:p>
           <a:p>
@@ -12844,6 +12848,15 @@
                 <a:spcPts val="4162"/>
               </a:lnSpc>
             </a:pPr>
+            <a:endParaRPr lang="en-US" sz="2199" spc="127" dirty="0">
+              <a:solidFill>
+                <a:srgbClr val="231F20"/>
+              </a:solidFill>
+              <a:latin typeface="Open Sauce"/>
+              <a:ea typeface="Open Sauce"/>
+              <a:cs typeface="Open Sauce"/>
+              <a:sym typeface="Open Sauce"/>
+            </a:endParaRPr>
           </a:p>
         </p:txBody>
       </p:sp>
@@ -12856,13 +12869,14 @@
 </file>
 
 <file path=ppt/slides/slide8.xml><?xml version="1.0" encoding="utf-8"?>
-<p:sld xmlns:p="http://schemas.openxmlformats.org/presentationml/2006/main" xmlns:a="http://schemas.openxmlformats.org/drawingml/2006/main" xmlns:r="http://schemas.openxmlformats.org/officeDocument/2006/relationships">
+<p:sld xmlns:a="http://schemas.openxmlformats.org/drawingml/2006/main" xmlns:r="http://schemas.openxmlformats.org/officeDocument/2006/relationships" xmlns:p="http://schemas.openxmlformats.org/presentationml/2006/main">
   <p:cSld>
     <p:bg>
       <p:bgPr>
         <a:solidFill>
           <a:srgbClr val="FDFBFB"/>
         </a:solidFill>
+        <a:effectLst/>
       </p:bgPr>
     </p:bg>
     <p:spTree>
@@ -12881,12 +12895,12 @@
       </p:grpSpPr>
       <p:grpSp>
         <p:nvGrpSpPr>
-          <p:cNvPr name="Group 2" id="2"/>
+          <p:cNvPr id="2" name="Group 2"/>
           <p:cNvGrpSpPr/>
           <p:nvPr/>
         </p:nvGrpSpPr>
         <p:grpSpPr>
-          <a:xfrm rot="0">
+          <a:xfrm>
             <a:off x="-1543050" y="-558218"/>
             <a:ext cx="3086100" cy="11299900"/>
             <a:chOff x="0" y="0"/>
@@ -12895,12 +12909,12 @@
         </p:grpSpPr>
         <p:sp>
           <p:nvSpPr>
-            <p:cNvPr name="Freeform 3" id="3"/>
+            <p:cNvPr id="3" name="Freeform 3"/>
             <p:cNvSpPr/>
             <p:nvPr/>
           </p:nvSpPr>
           <p:spPr>
-            <a:xfrm flipH="false" flipV="false" rot="0">
+            <a:xfrm>
               <a:off x="0" y="0"/>
               <a:ext cx="812800" cy="2976105"/>
             </a:xfrm>
@@ -12909,9 +12923,9 @@
               <a:gdLst/>
               <a:ahLst/>
               <a:cxnLst/>
-              <a:rect r="r" b="b" t="t" l="l"/>
+              <a:rect l="l" t="t" r="r" b="b"/>
               <a:pathLst>
-                <a:path h="2976105" w="812800">
+                <a:path w="812800" h="2976105">
                   <a:moveTo>
                     <a:pt x="0" y="0"/>
                   </a:moveTo>
@@ -12935,8 +12949,8 @@
         </p:sp>
         <p:sp>
           <p:nvSpPr>
-            <p:cNvPr name="TextBox 4" id="4"/>
-            <p:cNvSpPr txBox="true"/>
+            <p:cNvPr id="4" name="TextBox 4"/>
+            <p:cNvSpPr txBox="1"/>
             <p:nvPr/>
           </p:nvSpPr>
           <p:spPr>
@@ -12949,7 +12963,7 @@
             </a:prstGeom>
           </p:spPr>
           <p:txBody>
-            <a:bodyPr anchor="ctr" rtlCol="false" tIns="50800" lIns="50800" bIns="50800" rIns="50800"/>
+            <a:bodyPr lIns="50800" tIns="50800" rIns="50800" bIns="50800" rtlCol="0" anchor="ctr"/>
             <a:lstStyle/>
             <a:p>
               <a:pPr algn="ctr">
@@ -12957,18 +12971,19 @@
                   <a:spcPts val="2859"/>
                 </a:lnSpc>
               </a:pPr>
+              <a:endParaRPr/>
             </a:p>
           </p:txBody>
         </p:sp>
       </p:grpSp>
       <p:grpSp>
         <p:nvGrpSpPr>
-          <p:cNvPr name="Group 5" id="5"/>
+          <p:cNvPr id="5" name="Group 5"/>
           <p:cNvGrpSpPr/>
           <p:nvPr/>
         </p:nvGrpSpPr>
         <p:grpSpPr>
-          <a:xfrm rot="0">
+          <a:xfrm>
             <a:off x="9775211" y="7434605"/>
             <a:ext cx="8011958" cy="5659294"/>
             <a:chOff x="0" y="0"/>
@@ -12977,12 +12992,12 @@
         </p:grpSpPr>
         <p:sp>
           <p:nvSpPr>
-            <p:cNvPr name="Freeform 6" id="6"/>
+            <p:cNvPr id="6" name="Freeform 6"/>
             <p:cNvSpPr/>
             <p:nvPr/>
           </p:nvSpPr>
           <p:spPr>
-            <a:xfrm flipH="false" flipV="false" rot="0">
+            <a:xfrm>
               <a:off x="0" y="0"/>
               <a:ext cx="2110145" cy="1490514"/>
             </a:xfrm>
@@ -12991,9 +13006,9 @@
               <a:gdLst/>
               <a:ahLst/>
               <a:cxnLst/>
-              <a:rect r="r" b="b" t="t" l="l"/>
+              <a:rect l="l" t="t" r="r" b="b"/>
               <a:pathLst>
-                <a:path h="1490514" w="2110145">
+                <a:path w="2110145" h="1490514">
                   <a:moveTo>
                     <a:pt x="0" y="0"/>
                   </a:moveTo>
@@ -13017,8 +13032,8 @@
         </p:sp>
         <p:sp>
           <p:nvSpPr>
-            <p:cNvPr name="TextBox 7" id="7"/>
-            <p:cNvSpPr txBox="true"/>
+            <p:cNvPr id="7" name="TextBox 7"/>
+            <p:cNvSpPr txBox="1"/>
             <p:nvPr/>
           </p:nvSpPr>
           <p:spPr>
@@ -13031,7 +13046,7 @@
             </a:prstGeom>
           </p:spPr>
           <p:txBody>
-            <a:bodyPr anchor="ctr" rtlCol="false" tIns="50800" lIns="50800" bIns="50800" rIns="50800"/>
+            <a:bodyPr lIns="50800" tIns="50800" rIns="50800" bIns="50800" rtlCol="0" anchor="ctr"/>
             <a:lstStyle/>
             <a:p>
               <a:pPr algn="ctr">
@@ -13039,18 +13054,19 @@
                   <a:spcPts val="2859"/>
                 </a:lnSpc>
               </a:pPr>
+              <a:endParaRPr/>
             </a:p>
           </p:txBody>
         </p:sp>
       </p:grpSp>
       <p:sp>
         <p:nvSpPr>
-          <p:cNvPr name="Freeform 8" id="8"/>
+          <p:cNvPr id="8" name="Freeform 8"/>
           <p:cNvSpPr/>
           <p:nvPr/>
         </p:nvSpPr>
         <p:spPr>
-          <a:xfrm flipH="false" flipV="false" rot="0">
+          <a:xfrm>
             <a:off x="15698915" y="8697813"/>
             <a:ext cx="3806571" cy="2083232"/>
           </a:xfrm>
@@ -13059,9 +13075,9 @@
             <a:gdLst/>
             <a:ahLst/>
             <a:cxnLst/>
-            <a:rect r="r" b="b" t="t" l="l"/>
+            <a:rect l="l" t="t" r="r" b="b"/>
             <a:pathLst>
-              <a:path h="2083232" w="3806571">
+              <a:path w="3806571" h="2083232">
                 <a:moveTo>
                   <a:pt x="0" y="0"/>
                 </a:moveTo>
@@ -13082,27 +13098,27 @@
             </a:pathLst>
           </a:custGeom>
           <a:blipFill>
-            <a:blip r:embed="rId2">
+            <a:blip>
               <a:extLst>
                 <a:ext uri="{96DAC541-7B7A-43D3-8B79-37D633B846F1}">
-                  <asvg:svgBlip xmlns:asvg="http://schemas.microsoft.com/office/drawing/2016/SVG/main" r:embed="rId3"/>
+                  <asvg:svgBlip xmlns:asvg="http://schemas.microsoft.com/office/drawing/2016/SVG/main" r:embed="rId2"/>
                 </a:ext>
               </a:extLst>
             </a:blip>
             <a:stretch>
-              <a:fillRect l="0" t="0" r="0" b="0"/>
+              <a:fillRect/>
             </a:stretch>
           </a:blipFill>
         </p:spPr>
       </p:sp>
       <p:sp>
         <p:nvSpPr>
-          <p:cNvPr name="Freeform 9" id="9"/>
+          <p:cNvPr id="9" name="Freeform 9"/>
           <p:cNvSpPr/>
           <p:nvPr/>
         </p:nvSpPr>
         <p:spPr>
-          <a:xfrm flipH="false" flipV="false" rot="0">
+          <a:xfrm>
             <a:off x="9612894" y="2473135"/>
             <a:ext cx="102870" cy="4114800"/>
           </a:xfrm>
@@ -13111,9 +13127,9 @@
             <a:gdLst/>
             <a:ahLst/>
             <a:cxnLst/>
-            <a:rect r="r" b="b" t="t" l="l"/>
+            <a:rect l="l" t="t" r="r" b="b"/>
             <a:pathLst>
-              <a:path h="4114800" w="102870">
+              <a:path w="102870" h="4114800">
                 <a:moveTo>
                   <a:pt x="0" y="0"/>
                 </a:moveTo>
@@ -13134,27 +13150,27 @@
             </a:pathLst>
           </a:custGeom>
           <a:blipFill>
-            <a:blip r:embed="rId4">
+            <a:blip>
               <a:extLst>
                 <a:ext uri="{96DAC541-7B7A-43D3-8B79-37D633B846F1}">
-                  <asvg:svgBlip xmlns:asvg="http://schemas.microsoft.com/office/drawing/2016/SVG/main" r:embed="rId5"/>
+                  <asvg:svgBlip xmlns:asvg="http://schemas.microsoft.com/office/drawing/2016/SVG/main" r:embed="rId3"/>
                 </a:ext>
               </a:extLst>
             </a:blip>
             <a:stretch>
-              <a:fillRect l="0" t="0" r="0" b="0"/>
+              <a:fillRect/>
             </a:stretch>
           </a:blipFill>
         </p:spPr>
       </p:sp>
       <p:sp>
         <p:nvSpPr>
-          <p:cNvPr name="TextBox 10" id="10"/>
-          <p:cNvSpPr txBox="true"/>
+          <p:cNvPr id="10" name="TextBox 10"/>
+          <p:cNvSpPr txBox="1"/>
           <p:nvPr/>
         </p:nvSpPr>
         <p:spPr>
-          <a:xfrm rot="0">
+          <a:xfrm>
             <a:off x="1774233" y="482386"/>
             <a:ext cx="8053508" cy="1404697"/>
           </a:xfrm>
@@ -13163,7 +13179,7 @@
           </a:prstGeom>
         </p:spPr>
         <p:txBody>
-          <a:bodyPr anchor="t" rtlCol="false" tIns="0" lIns="0" bIns="0" rIns="0">
+          <a:bodyPr lIns="0" tIns="0" rIns="0" bIns="0" rtlCol="0" anchor="t">
             <a:spAutoFit/>
           </a:bodyPr>
           <a:lstStyle/>
@@ -13174,7 +13190,7 @@
               </a:lnSpc>
             </a:pPr>
             <a:r>
-              <a:rPr lang="en-US" sz="3968" spc="388" b="true">
+              <a:rPr lang="en-US" sz="3968" b="1" spc="388">
                 <a:solidFill>
                   <a:srgbClr val="231F20"/>
                 </a:solidFill>
@@ -13190,12 +13206,12 @@
       </p:sp>
       <p:sp>
         <p:nvSpPr>
-          <p:cNvPr name="TextBox 11" id="11"/>
-          <p:cNvSpPr txBox="true"/>
+          <p:cNvPr id="11" name="TextBox 11"/>
+          <p:cNvSpPr txBox="1"/>
           <p:nvPr/>
         </p:nvSpPr>
         <p:spPr>
-          <a:xfrm rot="0">
+          <a:xfrm>
             <a:off x="1967693" y="2188962"/>
             <a:ext cx="6951281" cy="7060819"/>
           </a:xfrm>
@@ -13204,7 +13220,7 @@
           </a:prstGeom>
         </p:spPr>
         <p:txBody>
-          <a:bodyPr anchor="t" rtlCol="false" tIns="0" lIns="0" bIns="0" rIns="0">
+          <a:bodyPr lIns="0" tIns="0" rIns="0" bIns="0" rtlCol="0" anchor="t">
             <a:spAutoFit/>
           </a:bodyPr>
           <a:lstStyle/>
@@ -13215,7 +13231,7 @@
               </a:lnSpc>
             </a:pPr>
             <a:r>
-              <a:rPr lang="en-US" b="true" sz="2299" spc="133">
+              <a:rPr lang="en-US" sz="2299" b="1" spc="133">
                 <a:solidFill>
                   <a:srgbClr val="231F20"/>
                 </a:solidFill>
@@ -13228,7 +13244,7 @@
             </a:r>
           </a:p>
           <a:p>
-            <a:pPr algn="just" marL="474979" indent="-237490" lvl="1">
+            <a:pPr marL="474979" lvl="1" indent="-237490" algn="just">
               <a:lnSpc>
                 <a:spcPts val="3981"/>
               </a:lnSpc>
@@ -13236,7 +13252,7 @@
               <a:buChar char="•"/>
             </a:pPr>
             <a:r>
-              <a:rPr lang="en-US" b="true" sz="2199" spc="127">
+              <a:rPr lang="en-US" sz="2199" b="1" spc="127">
                 <a:solidFill>
                   <a:srgbClr val="231F20"/>
                 </a:solidFill>
@@ -13245,19 +13261,7 @@
                 <a:cs typeface="Open Sauce Bold"/>
                 <a:sym typeface="Open Sauce Bold"/>
               </a:rPr>
-              <a:t>Reduced Alert Fatig</a:t>
-            </a:r>
-            <a:r>
-              <a:rPr lang="en-US" b="true" sz="2199" spc="127">
-                <a:solidFill>
-                  <a:srgbClr val="231F20"/>
-                </a:solidFill>
-                <a:latin typeface="Open Sauce Bold"/>
-                <a:ea typeface="Open Sauce Bold"/>
-                <a:cs typeface="Open Sauce Bold"/>
-                <a:sym typeface="Open Sauce Bold"/>
-              </a:rPr>
-              <a:t>ue: </a:t>
+              <a:t>Reduced Alert Fatigue: </a:t>
             </a:r>
             <a:r>
               <a:rPr lang="en-US" sz="2199" spc="127">
@@ -13273,7 +13277,7 @@
             </a:r>
           </a:p>
           <a:p>
-            <a:pPr algn="just" marL="474979" indent="-237490" lvl="1">
+            <a:pPr marL="474979" lvl="1" indent="-237490" algn="just">
               <a:lnSpc>
                 <a:spcPts val="3981"/>
               </a:lnSpc>
@@ -13281,7 +13285,7 @@
               <a:buChar char="•"/>
             </a:pPr>
             <a:r>
-              <a:rPr lang="en-US" b="true" sz="2199" spc="127">
+              <a:rPr lang="en-US" sz="2199" b="1" spc="127">
                 <a:solidFill>
                   <a:srgbClr val="231F20"/>
                 </a:solidFill>
@@ -13306,7 +13310,7 @@
             </a:r>
           </a:p>
           <a:p>
-            <a:pPr algn="just" marL="474979" indent="-237490" lvl="1">
+            <a:pPr marL="474979" lvl="1" indent="-237490" algn="just">
               <a:lnSpc>
                 <a:spcPts val="3981"/>
               </a:lnSpc>
@@ -13314,7 +13318,7 @@
               <a:buChar char="•"/>
             </a:pPr>
             <a:r>
-              <a:rPr lang="en-US" b="true" sz="2199" spc="127">
+              <a:rPr lang="en-US" sz="2199" b="1" spc="127">
                 <a:solidFill>
                   <a:srgbClr val="231F20"/>
                 </a:solidFill>
@@ -13344,17 +13348,26 @@
                 <a:spcPts val="4162"/>
               </a:lnSpc>
             </a:pPr>
+            <a:endParaRPr lang="en-US" sz="2199" spc="127">
+              <a:solidFill>
+                <a:srgbClr val="231F20"/>
+              </a:solidFill>
+              <a:latin typeface="Open Sauce"/>
+              <a:ea typeface="Open Sauce"/>
+              <a:cs typeface="Open Sauce"/>
+              <a:sym typeface="Open Sauce"/>
+            </a:endParaRPr>
           </a:p>
         </p:txBody>
       </p:sp>
       <p:sp>
         <p:nvSpPr>
-          <p:cNvPr name="TextBox 12" id="12"/>
-          <p:cNvSpPr txBox="true"/>
+          <p:cNvPr id="12" name="TextBox 12"/>
+          <p:cNvSpPr txBox="1"/>
           <p:nvPr/>
         </p:nvSpPr>
         <p:spPr>
-          <a:xfrm rot="0">
+          <a:xfrm>
             <a:off x="10409683" y="3475062"/>
             <a:ext cx="6951281" cy="3502343"/>
           </a:xfrm>
@@ -13363,12 +13376,12 @@
           </a:prstGeom>
         </p:spPr>
         <p:txBody>
-          <a:bodyPr anchor="t" rtlCol="false" tIns="0" lIns="0" bIns="0" rIns="0">
+          <a:bodyPr lIns="0" tIns="0" rIns="0" bIns="0" rtlCol="0" anchor="t">
             <a:spAutoFit/>
           </a:bodyPr>
           <a:lstStyle/>
           <a:p>
-            <a:pPr algn="just" marL="474979" indent="-237490" lvl="1">
+            <a:pPr marL="474979" lvl="1" indent="-237490" algn="just">
               <a:lnSpc>
                 <a:spcPts val="3981"/>
               </a:lnSpc>
@@ -13385,8 +13398,17 @@
                 <a:cs typeface="Open Sauce"/>
                 <a:sym typeface="Open Sauce"/>
               </a:rPr>
-              <a:t>Scaling integration with st</a:t>
-            </a:r>
+              <a:t>Scaling integration with state Medicaid MMIS platforms (such as Acentra Health evoBrix® X). </a:t>
+            </a:r>
+          </a:p>
+          <a:p>
+            <a:pPr marL="474979" lvl="1" indent="-237490" algn="just">
+              <a:lnSpc>
+                <a:spcPts val="3981"/>
+              </a:lnSpc>
+              <a:buFont typeface="Arial"/>
+              <a:buChar char="•"/>
+            </a:pPr>
             <a:r>
               <a:rPr lang="en-US" sz="2199" spc="127">
                 <a:solidFill>
@@ -13397,40 +13419,7 @@
                 <a:cs typeface="Open Sauce"/>
                 <a:sym typeface="Open Sauce"/>
               </a:rPr>
-              <a:t>ate Medicaid MMIS platforms (such as Acentra Health evoBrix® X). </a:t>
-            </a:r>
-          </a:p>
-          <a:p>
-            <a:pPr algn="just" marL="474979" indent="-237490" lvl="1">
-              <a:lnSpc>
-                <a:spcPts val="3981"/>
-              </a:lnSpc>
-              <a:buFont typeface="Arial"/>
-              <a:buChar char="•"/>
-            </a:pPr>
-            <a:r>
-              <a:rPr lang="en-US" sz="2199" spc="127">
-                <a:solidFill>
-                  <a:srgbClr val="000000"/>
-                </a:solidFill>
-                <a:latin typeface="Open Sauce"/>
-                <a:ea typeface="Open Sauce"/>
-                <a:cs typeface="Open Sauce"/>
-                <a:sym typeface="Open Sauce"/>
-              </a:rPr>
-              <a:t>Re</a:t>
-            </a:r>
-            <a:r>
-              <a:rPr lang="en-US" sz="2199" spc="127">
-                <a:solidFill>
-                  <a:srgbClr val="000000"/>
-                </a:solidFill>
-                <a:latin typeface="Open Sauce"/>
-                <a:ea typeface="Open Sauce"/>
-                <a:cs typeface="Open Sauce"/>
-                <a:sym typeface="Open Sauce"/>
-              </a:rPr>
-              <a:t>al-time streaming claim ingestion pipeline and automated payment-hold workflow orchestration.</a:t>
+              <a:t>Real-time streaming claim ingestion pipeline and automated payment-hold workflow orchestration.</a:t>
             </a:r>
           </a:p>
           <a:p>
@@ -13439,17 +13428,26 @@
                 <a:spcPts val="4162"/>
               </a:lnSpc>
             </a:pPr>
+            <a:endParaRPr lang="en-US" sz="2199" spc="127">
+              <a:solidFill>
+                <a:srgbClr val="000000"/>
+              </a:solidFill>
+              <a:latin typeface="Open Sauce"/>
+              <a:ea typeface="Open Sauce"/>
+              <a:cs typeface="Open Sauce"/>
+              <a:sym typeface="Open Sauce"/>
+            </a:endParaRPr>
           </a:p>
         </p:txBody>
       </p:sp>
       <p:sp>
         <p:nvSpPr>
-          <p:cNvPr name="TextBox 13" id="13"/>
-          <p:cNvSpPr txBox="true"/>
+          <p:cNvPr id="13" name="TextBox 13"/>
+          <p:cNvSpPr txBox="1"/>
           <p:nvPr/>
         </p:nvSpPr>
         <p:spPr>
-          <a:xfrm rot="0">
+          <a:xfrm>
             <a:off x="9827741" y="3811646"/>
             <a:ext cx="8115165" cy="531495"/>
           </a:xfrm>
@@ -13458,7 +13456,7 @@
           </a:prstGeom>
         </p:spPr>
         <p:txBody>
-          <a:bodyPr anchor="t" rtlCol="false" tIns="0" lIns="0" bIns="0" rIns="0">
+          <a:bodyPr lIns="0" tIns="0" rIns="0" bIns="0" rtlCol="0" anchor="t">
             <a:spAutoFit/>
           </a:bodyPr>
           <a:lstStyle/>
@@ -13485,12 +13483,12 @@
       </p:sp>
       <p:sp>
         <p:nvSpPr>
-          <p:cNvPr name="TextBox 14" id="14"/>
-          <p:cNvSpPr txBox="true"/>
+          <p:cNvPr id="14" name="TextBox 14"/>
+          <p:cNvSpPr txBox="1"/>
           <p:nvPr/>
         </p:nvSpPr>
         <p:spPr>
-          <a:xfrm rot="0">
+          <a:xfrm>
             <a:off x="10409683" y="895350"/>
             <a:ext cx="6951281" cy="3022219"/>
           </a:xfrm>
@@ -13499,7 +13497,7 @@
           </a:prstGeom>
         </p:spPr>
         <p:txBody>
-          <a:bodyPr anchor="t" rtlCol="false" tIns="0" lIns="0" bIns="0" rIns="0">
+          <a:bodyPr lIns="0" tIns="0" rIns="0" bIns="0" rtlCol="0" anchor="t">
             <a:spAutoFit/>
           </a:bodyPr>
           <a:lstStyle/>
@@ -13522,7 +13520,7 @@
               <a:t>I</a:t>
             </a:r>
             <a:r>
-              <a:rPr lang="en-US" b="true" sz="2299" spc="133">
+              <a:rPr lang="en-US" sz="2299" b="1" spc="133">
                 <a:solidFill>
                   <a:srgbClr val="000000"/>
                 </a:solidFill>
@@ -13535,7 +13533,7 @@
             </a:r>
           </a:p>
           <a:p>
-            <a:pPr algn="just" marL="474979" indent="-237490" lvl="1">
+            <a:pPr marL="474979" lvl="1" indent="-237490" algn="just">
               <a:lnSpc>
                 <a:spcPts val="3981"/>
               </a:lnSpc>
@@ -13552,19 +13550,7 @@
                 <a:cs typeface="Open Sauce"/>
                 <a:sym typeface="Open Sauce"/>
               </a:rPr>
-              <a:t>Au</a:t>
-            </a:r>
-            <a:r>
-              <a:rPr lang="en-US" sz="2199" spc="127">
-                <a:solidFill>
-                  <a:srgbClr val="000000"/>
-                </a:solidFill>
-                <a:latin typeface="Open Sauce"/>
-                <a:ea typeface="Open Sauce"/>
-                <a:cs typeface="Open Sauce"/>
-                <a:sym typeface="Open Sauce"/>
-              </a:rPr>
-              <a:t>to-compiling Provider Wiki Entries build an enduring knowledge base that persists across investigator shifts and team transitions. </a:t>
+              <a:t>Auto-compiling Provider Wiki Entries build an enduring knowledge base that persists across investigator shifts and team transitions. </a:t>
             </a:r>
           </a:p>
           <a:p>
@@ -13573,17 +13559,26 @@
                 <a:spcPts val="4162"/>
               </a:lnSpc>
             </a:pPr>
+            <a:endParaRPr lang="en-US" sz="2199" spc="127">
+              <a:solidFill>
+                <a:srgbClr val="000000"/>
+              </a:solidFill>
+              <a:latin typeface="Open Sauce"/>
+              <a:ea typeface="Open Sauce"/>
+              <a:cs typeface="Open Sauce"/>
+              <a:sym typeface="Open Sauce"/>
+            </a:endParaRPr>
           </a:p>
         </p:txBody>
       </p:sp>
       <p:sp>
         <p:nvSpPr>
-          <p:cNvPr name="TextBox 15" id="15"/>
-          <p:cNvSpPr txBox="true"/>
+          <p:cNvPr id="15" name="TextBox 15"/>
+          <p:cNvSpPr txBox="1"/>
           <p:nvPr/>
         </p:nvSpPr>
         <p:spPr>
-          <a:xfrm rot="0">
+          <a:xfrm>
             <a:off x="10172835" y="7533761"/>
             <a:ext cx="8115165" cy="531495"/>
           </a:xfrm>
@@ -13592,7 +13587,7 @@
           </a:prstGeom>
         </p:spPr>
         <p:txBody>
-          <a:bodyPr anchor="t" rtlCol="false" tIns="0" lIns="0" bIns="0" rIns="0">
+          <a:bodyPr lIns="0" tIns="0" rIns="0" bIns="0" rtlCol="0" anchor="t">
             <a:spAutoFit/>
           </a:bodyPr>
           <a:lstStyle/>
@@ -13603,7 +13598,7 @@
               </a:lnSpc>
             </a:pPr>
             <a:r>
-              <a:rPr lang="en-US" sz="3000" spc="294" b="true">
+              <a:rPr lang="en-US" sz="3000" b="1" spc="294">
                 <a:solidFill>
                   <a:srgbClr val="FFFFFF"/>
                 </a:solidFill>
@@ -13619,12 +13614,12 @@
       </p:sp>
       <p:sp>
         <p:nvSpPr>
-          <p:cNvPr name="TextBox 16" id="16"/>
-          <p:cNvSpPr txBox="true"/>
+          <p:cNvPr id="16" name="TextBox 16"/>
+          <p:cNvSpPr txBox="1"/>
           <p:nvPr/>
         </p:nvSpPr>
         <p:spPr>
-          <a:xfrm rot="0">
+          <a:xfrm>
             <a:off x="10379953" y="8212635"/>
             <a:ext cx="6951281" cy="1526794"/>
           </a:xfrm>
@@ -13633,7 +13628,7 @@
           </a:prstGeom>
         </p:spPr>
         <p:txBody>
-          <a:bodyPr anchor="t" rtlCol="false" tIns="0" lIns="0" bIns="0" rIns="0">
+          <a:bodyPr lIns="0" tIns="0" rIns="0" bIns="0" rtlCol="0" anchor="t">
             <a:spAutoFit/>
           </a:bodyPr>
           <a:lstStyle/>
@@ -13653,19 +13648,7 @@
                 <a:cs typeface="Open Sauce"/>
                 <a:sym typeface="Open Sauce"/>
               </a:rPr>
-              <a:t>Acentra Health C</a:t>
-            </a:r>
-            <a:r>
-              <a:rPr lang="en-US" sz="2299" spc="133">
-                <a:solidFill>
-                  <a:srgbClr val="FFFFFF"/>
-                </a:solidFill>
-                <a:latin typeface="Open Sauce"/>
-                <a:ea typeface="Open Sauce"/>
-                <a:cs typeface="Open Sauce"/>
-                <a:sym typeface="Open Sauce"/>
-              </a:rPr>
-              <a:t>are | ClaimShield Nexus — Empowering SIU Investigators with Explainable AI."</a:t>
+              <a:t>Acentra Health Care | ClaimShield Nexus — Empowering SIU Investigators with Explainable AI."</a:t>
             </a:r>
           </a:p>
         </p:txBody>
@@ -13679,13 +13662,14 @@
 </file>
 
 <file path=ppt/slides/slide9.xml><?xml version="1.0" encoding="utf-8"?>
-<p:sld xmlns:p="http://schemas.openxmlformats.org/presentationml/2006/main" xmlns:a="http://schemas.openxmlformats.org/drawingml/2006/main" xmlns:r="http://schemas.openxmlformats.org/officeDocument/2006/relationships">
+<p:sld xmlns:a="http://schemas.openxmlformats.org/drawingml/2006/main" xmlns:r="http://schemas.openxmlformats.org/officeDocument/2006/relationships" xmlns:p="http://schemas.openxmlformats.org/presentationml/2006/main">
   <p:cSld>
     <p:bg>
       <p:bgPr>
         <a:solidFill>
           <a:srgbClr val="FDFBFB"/>
         </a:solidFill>
+        <a:effectLst/>
       </p:bgPr>
     </p:bg>
     <p:spTree>
@@ -13704,12 +13688,12 @@
       </p:grpSpPr>
       <p:grpSp>
         <p:nvGrpSpPr>
-          <p:cNvPr name="Group 2" id="2"/>
+          <p:cNvPr id="2" name="Group 2"/>
           <p:cNvGrpSpPr/>
           <p:nvPr/>
         </p:nvGrpSpPr>
         <p:grpSpPr>
-          <a:xfrm rot="0">
+          <a:xfrm>
             <a:off x="12974764" y="-207071"/>
             <a:ext cx="3086100" cy="11299900"/>
             <a:chOff x="0" y="0"/>
@@ -13718,12 +13702,12 @@
         </p:grpSpPr>
         <p:sp>
           <p:nvSpPr>
-            <p:cNvPr name="Freeform 3" id="3"/>
+            <p:cNvPr id="3" name="Freeform 3"/>
             <p:cNvSpPr/>
             <p:nvPr/>
           </p:nvSpPr>
           <p:spPr>
-            <a:xfrm flipH="false" flipV="false" rot="0">
+            <a:xfrm>
               <a:off x="0" y="0"/>
               <a:ext cx="812800" cy="2976105"/>
             </a:xfrm>
@@ -13732,9 +13716,9 @@
               <a:gdLst/>
               <a:ahLst/>
               <a:cxnLst/>
-              <a:rect r="r" b="b" t="t" l="l"/>
+              <a:rect l="l" t="t" r="r" b="b"/>
               <a:pathLst>
-                <a:path h="2976105" w="812800">
+                <a:path w="812800" h="2976105">
                   <a:moveTo>
                     <a:pt x="0" y="0"/>
                   </a:moveTo>
@@ -13758,8 +13742,8 @@
         </p:sp>
         <p:sp>
           <p:nvSpPr>
-            <p:cNvPr name="TextBox 4" id="4"/>
-            <p:cNvSpPr txBox="true"/>
+            <p:cNvPr id="4" name="TextBox 4"/>
+            <p:cNvSpPr txBox="1"/>
             <p:nvPr/>
           </p:nvSpPr>
           <p:spPr>
@@ -13772,7 +13756,7 @@
             </a:prstGeom>
           </p:spPr>
           <p:txBody>
-            <a:bodyPr anchor="ctr" rtlCol="false" tIns="50800" lIns="50800" bIns="50800" rIns="50800"/>
+            <a:bodyPr lIns="50800" tIns="50800" rIns="50800" bIns="50800" rtlCol="0" anchor="ctr"/>
             <a:lstStyle/>
             <a:p>
               <a:pPr algn="ctr">
@@ -13780,18 +13764,19 @@
                   <a:spcPts val="2859"/>
                 </a:lnSpc>
               </a:pPr>
+              <a:endParaRPr/>
             </a:p>
           </p:txBody>
         </p:sp>
       </p:grpSp>
       <p:sp>
         <p:nvSpPr>
-          <p:cNvPr name="Freeform 5" id="5"/>
+          <p:cNvPr id="5" name="Freeform 5"/>
           <p:cNvSpPr/>
           <p:nvPr/>
         </p:nvSpPr>
         <p:spPr>
-          <a:xfrm flipH="false" flipV="false" rot="0">
+          <a:xfrm>
             <a:off x="16384715" y="9009597"/>
             <a:ext cx="3806571" cy="2083232"/>
           </a:xfrm>
@@ -13800,9 +13785,9 @@
             <a:gdLst/>
             <a:ahLst/>
             <a:cxnLst/>
-            <a:rect r="r" b="b" t="t" l="l"/>
+            <a:rect l="l" t="t" r="r" b="b"/>
             <a:pathLst>
-              <a:path h="2083232" w="3806571">
+              <a:path w="3806571" h="2083232">
                 <a:moveTo>
                   <a:pt x="0" y="0"/>
                 </a:moveTo>
@@ -13823,27 +13808,27 @@
             </a:pathLst>
           </a:custGeom>
           <a:blipFill>
-            <a:blip r:embed="rId2">
+            <a:blip>
               <a:extLst>
                 <a:ext uri="{96DAC541-7B7A-43D3-8B79-37D633B846F1}">
-                  <asvg:svgBlip xmlns:asvg="http://schemas.microsoft.com/office/drawing/2016/SVG/main" r:embed="rId3"/>
+                  <asvg:svgBlip xmlns:asvg="http://schemas.microsoft.com/office/drawing/2016/SVG/main" r:embed="rId2"/>
                 </a:ext>
               </a:extLst>
             </a:blip>
             <a:stretch>
-              <a:fillRect l="0" t="0" r="0" b="0"/>
+              <a:fillRect/>
             </a:stretch>
           </a:blipFill>
         </p:spPr>
       </p:sp>
       <p:grpSp>
         <p:nvGrpSpPr>
-          <p:cNvPr name="Group 6" id="6"/>
+          <p:cNvPr id="6" name="Group 6"/>
           <p:cNvGrpSpPr/>
           <p:nvPr/>
         </p:nvGrpSpPr>
         <p:grpSpPr>
-          <a:xfrm rot="0">
+          <a:xfrm>
             <a:off x="-1543050" y="-558218"/>
             <a:ext cx="3086100" cy="11299900"/>
             <a:chOff x="0" y="0"/>
@@ -13852,12 +13837,12 @@
         </p:grpSpPr>
         <p:sp>
           <p:nvSpPr>
-            <p:cNvPr name="Freeform 7" id="7"/>
+            <p:cNvPr id="7" name="Freeform 7"/>
             <p:cNvSpPr/>
             <p:nvPr/>
           </p:nvSpPr>
           <p:spPr>
-            <a:xfrm flipH="false" flipV="false" rot="0">
+            <a:xfrm>
               <a:off x="0" y="0"/>
               <a:ext cx="812800" cy="2976105"/>
             </a:xfrm>
@@ -13866,9 +13851,9 @@
               <a:gdLst/>
               <a:ahLst/>
               <a:cxnLst/>
-              <a:rect r="r" b="b" t="t" l="l"/>
+              <a:rect l="l" t="t" r="r" b="b"/>
               <a:pathLst>
-                <a:path h="2976105" w="812800">
+                <a:path w="812800" h="2976105">
                   <a:moveTo>
                     <a:pt x="0" y="0"/>
                   </a:moveTo>
@@ -13892,8 +13877,8 @@
         </p:sp>
         <p:sp>
           <p:nvSpPr>
-            <p:cNvPr name="TextBox 8" id="8"/>
-            <p:cNvSpPr txBox="true"/>
+            <p:cNvPr id="8" name="TextBox 8"/>
+            <p:cNvSpPr txBox="1"/>
             <p:nvPr/>
           </p:nvSpPr>
           <p:spPr>
@@ -13906,7 +13891,7 @@
             </a:prstGeom>
           </p:spPr>
           <p:txBody>
-            <a:bodyPr anchor="ctr" rtlCol="false" tIns="50800" lIns="50800" bIns="50800" rIns="50800"/>
+            <a:bodyPr lIns="50800" tIns="50800" rIns="50800" bIns="50800" rtlCol="0" anchor="ctr"/>
             <a:lstStyle/>
             <a:p>
               <a:pPr algn="ctr">
@@ -13914,18 +13899,19 @@
                   <a:spcPts val="2859"/>
                 </a:lnSpc>
               </a:pPr>
+              <a:endParaRPr/>
             </a:p>
           </p:txBody>
         </p:sp>
       </p:grpSp>
       <p:grpSp>
         <p:nvGrpSpPr>
-          <p:cNvPr name="Group 9" id="9"/>
+          <p:cNvPr id="9" name="Group 9"/>
           <p:cNvGrpSpPr/>
           <p:nvPr/>
         </p:nvGrpSpPr>
         <p:grpSpPr>
-          <a:xfrm rot="0">
+          <a:xfrm>
             <a:off x="1227773" y="4163622"/>
             <a:ext cx="110236" cy="2818996"/>
             <a:chOff x="0" y="0"/>
@@ -13934,12 +13920,12 @@
         </p:grpSpPr>
         <p:sp>
           <p:nvSpPr>
-            <p:cNvPr name="Freeform 10" id="10"/>
+            <p:cNvPr id="10" name="Freeform 10"/>
             <p:cNvSpPr/>
             <p:nvPr/>
           </p:nvSpPr>
           <p:spPr>
-            <a:xfrm flipH="false" flipV="false" rot="0">
+            <a:xfrm>
               <a:off x="0" y="0"/>
               <a:ext cx="26312" cy="672855"/>
             </a:xfrm>
@@ -13948,9 +13934,9 @@
               <a:gdLst/>
               <a:ahLst/>
               <a:cxnLst/>
-              <a:rect r="r" b="b" t="t" l="l"/>
+              <a:rect l="l" t="t" r="r" b="b"/>
               <a:pathLst>
-                <a:path h="672855" w="26312">
+                <a:path w="26312" h="672855">
                   <a:moveTo>
                     <a:pt x="0" y="0"/>
                   </a:moveTo>
@@ -13974,8 +13960,8 @@
         </p:sp>
         <p:sp>
           <p:nvSpPr>
-            <p:cNvPr name="TextBox 11" id="11"/>
-            <p:cNvSpPr txBox="true"/>
+            <p:cNvPr id="11" name="TextBox 11"/>
+            <p:cNvSpPr txBox="1"/>
             <p:nvPr/>
           </p:nvSpPr>
           <p:spPr>
@@ -13988,7 +13974,7 @@
             </a:prstGeom>
           </p:spPr>
           <p:txBody>
-            <a:bodyPr anchor="ctr" rtlCol="false" tIns="50800" lIns="50800" bIns="50800" rIns="50800"/>
+            <a:bodyPr lIns="50800" tIns="50800" rIns="50800" bIns="50800" rtlCol="0" anchor="ctr"/>
             <a:lstStyle/>
             <a:p>
               <a:pPr algn="ctr">
@@ -13996,18 +13982,19 @@
                   <a:spcPts val="2859"/>
                 </a:lnSpc>
               </a:pPr>
+              <a:endParaRPr/>
             </a:p>
           </p:txBody>
         </p:sp>
       </p:grpSp>
       <p:sp>
         <p:nvSpPr>
-          <p:cNvPr name="Freeform 12" id="12"/>
+          <p:cNvPr id="12" name="Freeform 12"/>
           <p:cNvSpPr/>
           <p:nvPr/>
         </p:nvSpPr>
         <p:spPr>
-          <a:xfrm flipH="false" flipV="false" rot="0">
+          <a:xfrm>
             <a:off x="-2777871" y="-207071"/>
             <a:ext cx="3806571" cy="2083232"/>
           </a:xfrm>
@@ -14016,9 +14003,9 @@
             <a:gdLst/>
             <a:ahLst/>
             <a:cxnLst/>
-            <a:rect r="r" b="b" t="t" l="l"/>
+            <a:rect l="l" t="t" r="r" b="b"/>
             <a:pathLst>
-              <a:path h="2083232" w="3806571">
+              <a:path w="3806571" h="2083232">
                 <a:moveTo>
                   <a:pt x="0" y="0"/>
                 </a:moveTo>
@@ -14039,27 +14026,27 @@
             </a:pathLst>
           </a:custGeom>
           <a:blipFill>
-            <a:blip r:embed="rId4">
+            <a:blip>
               <a:extLst>
                 <a:ext uri="{96DAC541-7B7A-43D3-8B79-37D633B846F1}">
-                  <asvg:svgBlip xmlns:asvg="http://schemas.microsoft.com/office/drawing/2016/SVG/main" r:embed="rId5"/>
+                  <asvg:svgBlip xmlns:asvg="http://schemas.microsoft.com/office/drawing/2016/SVG/main" r:embed="rId3"/>
                 </a:ext>
               </a:extLst>
             </a:blip>
             <a:stretch>
-              <a:fillRect l="0" t="0" r="0" b="0"/>
+              <a:fillRect/>
             </a:stretch>
           </a:blipFill>
         </p:spPr>
       </p:sp>
       <p:sp>
         <p:nvSpPr>
-          <p:cNvPr name="TextBox 13" id="13"/>
-          <p:cNvSpPr txBox="true"/>
+          <p:cNvPr id="13" name="TextBox 13"/>
+          <p:cNvSpPr txBox="1"/>
           <p:nvPr/>
         </p:nvSpPr>
         <p:spPr>
-          <a:xfrm rot="0">
+          <a:xfrm>
             <a:off x="4722919" y="4383892"/>
             <a:ext cx="5071977" cy="1225181"/>
           </a:xfrm>
@@ -14068,12 +14055,12 @@
           </a:prstGeom>
         </p:spPr>
         <p:txBody>
-          <a:bodyPr anchor="t" rtlCol="false" tIns="0" lIns="0" bIns="0" rIns="0">
+          <a:bodyPr lIns="0" tIns="0" rIns="0" bIns="0" rtlCol="0" anchor="t">
             <a:spAutoFit/>
           </a:bodyPr>
           <a:lstStyle/>
           <a:p>
-            <a:pPr algn="l" marL="0" indent="0" lvl="0">
+            <a:pPr marL="0" lvl="0" indent="0" algn="l">
               <a:lnSpc>
                 <a:spcPts val="9413"/>
               </a:lnSpc>
@@ -14082,7 +14069,7 @@
               </a:spcBef>
             </a:pPr>
             <a:r>
-              <a:rPr lang="en-US" b="true" sz="6821" spc="34">
+              <a:rPr lang="en-US" sz="6821" b="1" spc="34">
                 <a:solidFill>
                   <a:srgbClr val="1C5739"/>
                 </a:solidFill>
